--- a/brainstorm/QueryCopilot_Highlight.pptx
+++ b/brainstorm/QueryCopilot_Highlight.pptx
@@ -5,10 +5,11 @@
     <p:sldMasterId id="2147483648" r:id="rId1"/>
   </p:sldMasterIdLst>
   <p:notesMasterIdLst>
-    <p:notesMasterId r:id="rId3"/>
+    <p:notesMasterId r:id="rId4"/>
   </p:notesMasterIdLst>
   <p:sldIdLst>
     <p:sldId id="2147481535" r:id="rId2"/>
+    <p:sldId id="2147481536" r:id="rId3"/>
   </p:sldIdLst>
   <p:sldSz cx="12192000" cy="6858000"/>
   <p:notesSz cx="6858000" cy="12192000"/>
@@ -1187,7 +1188,7 @@
                 <a:ea typeface="Arial" pitchFamily="34" charset="-122"/>
                 <a:cs typeface="Arial" pitchFamily="34" charset="-120"/>
               </a:rPr>
-              <a:t>Brainstorming — v1 direction confirmed 2026-08-29</a:t>
+              <a:t>Brainstorming — v1 direction confirmed 2026-08-30</a:t>
             </a:r>
             <a:endParaRPr lang="en-US" sz="1050" dirty="0"/>
           </a:p>
@@ -2242,7 +2243,7 @@
                 <a:ea typeface="Arial" pitchFamily="34" charset="-122"/>
                 <a:cs typeface="Arial" pitchFamily="34" charset="-120"/>
               </a:rPr>
-              <a:t>100+</a:t>
+              <a:t>1000+</a:t>
             </a:r>
             <a:endParaRPr lang="en-US" sz="3000" dirty="0"/>
           </a:p>
@@ -2284,7 +2285,7 @@
                 <a:ea typeface="Arial" pitchFamily="34" charset="-122"/>
                 <a:cs typeface="Arial" pitchFamily="34" charset="-120"/>
               </a:rPr>
-              <a:t>real support-ticket examples being compiled as the template corpus</a:t>
+              <a:t>real world queries being compiled as the template corpus</a:t>
             </a:r>
             <a:endParaRPr lang="en-US" sz="1050" dirty="0"/>
           </a:p>
@@ -2554,6 +2555,1526 @@
                 <a:cs typeface="Arial" pitchFamily="34" charset="-120"/>
               </a:rPr>
               <a:t>Build the Asset Menu: catalog Libraries (with metadata) + APIs (with signatures) into one shared schema</a:t>
+            </a:r>
+            <a:endParaRPr lang="en-US" sz="1100" dirty="0"/>
+          </a:p>
+        </p:txBody>
+      </p:sp>
+    </p:spTree>
+  </p:cSld>
+  <p:clrMapOvr>
+    <a:masterClrMapping/>
+  </p:clrMapOvr>
+</p:sld>
+</file>
+
+<file path=ppt/slides/slide2.xml><?xml version="1.0" encoding="utf-8"?>
+<p:sld xmlns:a="http://schemas.openxmlformats.org/drawingml/2006/main" xmlns:r="http://schemas.openxmlformats.org/officeDocument/2006/relationships" xmlns:p="http://schemas.openxmlformats.org/presentationml/2006/main">
+  <p:cSld>
+    <p:spTree>
+      <p:nvGrpSpPr>
+        <p:cNvPr id="1" name=""/>
+        <p:cNvGrpSpPr/>
+        <p:nvPr/>
+      </p:nvGrpSpPr>
+      <p:grpSpPr>
+        <a:xfrm>
+          <a:off x="0" y="0"/>
+          <a:ext cx="0" cy="0"/>
+          <a:chOff x="0" y="0"/>
+          <a:chExt cx="0" cy="0"/>
+        </a:xfrm>
+      </p:grpSpPr>
+      <p:sp>
+        <p:nvSpPr>
+          <p:cNvPr id="2" name="Shape 0"/>
+          <p:cNvSpPr/>
+          <p:nvPr/>
+        </p:nvSpPr>
+        <p:spPr>
+          <a:xfrm>
+            <a:off x="0" y="0"/>
+            <a:ext cx="4114800" cy="6858000"/>
+          </a:xfrm>
+          <a:prstGeom prst="rect">
+            <a:avLst/>
+          </a:prstGeom>
+          <a:solidFill>
+            <a:srgbClr val="3B4652"/>
+          </a:solidFill>
+          <a:ln/>
+        </p:spPr>
+        <p:txBody>
+          <a:bodyPr/>
+          <a:lstStyle/>
+          <a:p>
+            <a:endParaRPr lang="en-US"/>
+          </a:p>
+        </p:txBody>
+      </p:sp>
+      <p:sp>
+        <p:nvSpPr>
+          <p:cNvPr id="3" name="Shape 1"/>
+          <p:cNvSpPr/>
+          <p:nvPr/>
+        </p:nvSpPr>
+        <p:spPr>
+          <a:xfrm>
+            <a:off x="457200" y="457200"/>
+            <a:ext cx="566928" cy="566928"/>
+          </a:xfrm>
+          <a:prstGeom prst="ellipse">
+            <a:avLst/>
+          </a:prstGeom>
+          <a:solidFill>
+            <a:srgbClr val="0098C7"/>
+          </a:solidFill>
+          <a:ln/>
+        </p:spPr>
+        <p:txBody>
+          <a:bodyPr/>
+          <a:lstStyle/>
+          <a:p>
+            <a:endParaRPr lang="en-US"/>
+          </a:p>
+        </p:txBody>
+      </p:sp>
+      <p:pic>
+        <p:nvPicPr>
+          <p:cNvPr id="4" name="Image 0" descr="preencoded.png"/>
+          <p:cNvPicPr>
+            <a:picLocks noChangeAspect="1"/>
+          </p:cNvPicPr>
+          <p:nvPr/>
+        </p:nvPicPr>
+        <p:blipFill>
+          <a:blip r:embed="rId2"/>
+          <a:stretch>
+            <a:fillRect/>
+          </a:stretch>
+        </p:blipFill>
+        <p:spPr>
+          <a:xfrm>
+            <a:off x="576072" y="576072"/>
+            <a:ext cx="329184" cy="329184"/>
+          </a:xfrm>
+          <a:prstGeom prst="rect">
+            <a:avLst/>
+          </a:prstGeom>
+        </p:spPr>
+      </p:pic>
+      <p:sp>
+        <p:nvSpPr>
+          <p:cNvPr id="5" name="Text 2"/>
+          <p:cNvSpPr/>
+          <p:nvPr/>
+        </p:nvSpPr>
+        <p:spPr>
+          <a:xfrm>
+            <a:off x="1170432" y="429768"/>
+            <a:ext cx="2743200" cy="621792"/>
+          </a:xfrm>
+          <a:prstGeom prst="rect">
+            <a:avLst/>
+          </a:prstGeom>
+          <a:noFill/>
+          <a:ln/>
+        </p:spPr>
+        <p:txBody>
+          <a:bodyPr wrap="square" lIns="0" tIns="0" rIns="0" bIns="0" rtlCol="0" anchor="ctr"/>
+          <a:lstStyle/>
+          <a:p>
+            <a:pPr marL="0" indent="0">
+              <a:buNone/>
+            </a:pPr>
+            <a:r>
+              <a:rPr lang="en-US" sz="2500" b="1" dirty="0">
+                <a:solidFill>
+                  <a:srgbClr val="FFFFFF"/>
+                </a:solidFill>
+                <a:latin typeface="Arial" pitchFamily="34" charset="0"/>
+                <a:ea typeface="Arial" pitchFamily="34" charset="-122"/>
+                <a:cs typeface="Arial" pitchFamily="34" charset="-120"/>
+              </a:rPr>
+              <a:t>LONG-TERM PLAN</a:t>
+            </a:r>
+            <a:endParaRPr lang="en-US" sz="2500" dirty="0"/>
+          </a:p>
+        </p:txBody>
+      </p:sp>
+      <p:sp>
+        <p:nvSpPr>
+          <p:cNvPr id="6" name="Text 3"/>
+          <p:cNvSpPr/>
+          <p:nvPr/>
+        </p:nvSpPr>
+        <p:spPr>
+          <a:xfrm>
+            <a:off x="457200" y="1170432"/>
+            <a:ext cx="3337560" cy="365760"/>
+          </a:xfrm>
+          <a:prstGeom prst="rect">
+            <a:avLst/>
+          </a:prstGeom>
+          <a:noFill/>
+          <a:ln/>
+        </p:spPr>
+        <p:txBody>
+          <a:bodyPr wrap="square" lIns="0" tIns="0" rIns="0" bIns="0" rtlCol="0" anchor="ctr"/>
+          <a:lstStyle/>
+          <a:p>
+            <a:pPr marL="0" indent="0">
+              <a:buNone/>
+            </a:pPr>
+            <a:r>
+              <a:rPr lang="en-US" sz="1350" i="1" dirty="0">
+                <a:solidFill>
+                  <a:srgbClr val="EEEFF0"/>
+                </a:solidFill>
+                <a:latin typeface="Arial" pitchFamily="34" charset="0"/>
+                <a:ea typeface="Arial" pitchFamily="34" charset="-122"/>
+                <a:cs typeface="Arial" pitchFamily="34" charset="-120"/>
+              </a:rPr>
+              <a:t>Agent-Native Asset Menu Consumption</a:t>
+            </a:r>
+            <a:endParaRPr lang="en-US" sz="1350" dirty="0"/>
+          </a:p>
+        </p:txBody>
+      </p:sp>
+      <p:sp>
+        <p:nvSpPr>
+          <p:cNvPr id="7" name="Text 4"/>
+          <p:cNvSpPr/>
+          <p:nvPr/>
+        </p:nvSpPr>
+        <p:spPr>
+          <a:xfrm>
+            <a:off x="457200" y="1737360"/>
+            <a:ext cx="3291840" cy="237744"/>
+          </a:xfrm>
+          <a:prstGeom prst="rect">
+            <a:avLst/>
+          </a:prstGeom>
+          <a:noFill/>
+          <a:ln/>
+        </p:spPr>
+        <p:txBody>
+          <a:bodyPr wrap="square" lIns="0" tIns="0" rIns="0" bIns="0" rtlCol="0" anchor="ctr"/>
+          <a:lstStyle/>
+          <a:p>
+            <a:pPr marL="0" indent="0">
+              <a:buNone/>
+            </a:pPr>
+            <a:r>
+              <a:rPr lang="en-US" sz="1100" b="1" kern="0" spc="200" dirty="0">
+                <a:solidFill>
+                  <a:srgbClr val="0098C7"/>
+                </a:solidFill>
+                <a:latin typeface="Arial" pitchFamily="34" charset="0"/>
+                <a:ea typeface="Arial" pitchFamily="34" charset="-122"/>
+                <a:cs typeface="Arial" pitchFamily="34" charset="-120"/>
+              </a:rPr>
+              <a:t>THE CONSTRAINT</a:t>
+            </a:r>
+            <a:endParaRPr lang="en-US" sz="1100" dirty="0"/>
+          </a:p>
+        </p:txBody>
+      </p:sp>
+      <p:sp>
+        <p:nvSpPr>
+          <p:cNvPr id="8" name="Text 5"/>
+          <p:cNvSpPr/>
+          <p:nvPr/>
+        </p:nvSpPr>
+        <p:spPr>
+          <a:xfrm>
+            <a:off x="457200" y="1993392"/>
+            <a:ext cx="3337560" cy="914400"/>
+          </a:xfrm>
+          <a:prstGeom prst="rect">
+            <a:avLst/>
+          </a:prstGeom>
+          <a:noFill/>
+          <a:ln/>
+        </p:spPr>
+        <p:txBody>
+          <a:bodyPr wrap="square" lIns="0" tIns="0" rIns="0" bIns="0" rtlCol="0" anchor="ctr"/>
+          <a:lstStyle/>
+          <a:p>
+            <a:pPr marL="0" indent="0">
+              <a:lnSpc>
+                <a:spcPct val="110000"/>
+              </a:lnSpc>
+              <a:buNone/>
+            </a:pPr>
+            <a:r>
+              <a:rPr lang="en-US" sz="1250" dirty="0">
+                <a:solidFill>
+                  <a:srgbClr val="EEEFF0"/>
+                </a:solidFill>
+                <a:latin typeface="Arial" pitchFamily="34" charset="0"/>
+                <a:ea typeface="Arial" pitchFamily="34" charset="-122"/>
+                <a:cs typeface="Arial" pitchFamily="34" charset="-120"/>
+              </a:rPr>
+              <a:t>GTO permits only on-prem Vectara RAG deployment. Approved models sit well below Claude/ChatGPT-class accuracy — why v1 keeps the LLM narrow.</a:t>
+            </a:r>
+            <a:endParaRPr lang="en-US" sz="1250" dirty="0"/>
+          </a:p>
+        </p:txBody>
+      </p:sp>
+      <p:sp>
+        <p:nvSpPr>
+          <p:cNvPr id="9" name="Shape 6"/>
+          <p:cNvSpPr/>
+          <p:nvPr/>
+        </p:nvSpPr>
+        <p:spPr>
+          <a:xfrm>
+            <a:off x="457200" y="3063240"/>
+            <a:ext cx="54864" cy="1280160"/>
+          </a:xfrm>
+          <a:prstGeom prst="rect">
+            <a:avLst/>
+          </a:prstGeom>
+          <a:solidFill>
+            <a:srgbClr val="007B8C"/>
+          </a:solidFill>
+          <a:ln/>
+        </p:spPr>
+        <p:txBody>
+          <a:bodyPr/>
+          <a:lstStyle/>
+          <a:p>
+            <a:endParaRPr lang="en-US"/>
+          </a:p>
+        </p:txBody>
+      </p:sp>
+      <p:sp>
+        <p:nvSpPr>
+          <p:cNvPr id="10" name="Text 7"/>
+          <p:cNvSpPr/>
+          <p:nvPr/>
+        </p:nvSpPr>
+        <p:spPr>
+          <a:xfrm>
+            <a:off x="640080" y="3063240"/>
+            <a:ext cx="3108960" cy="237744"/>
+          </a:xfrm>
+          <a:prstGeom prst="rect">
+            <a:avLst/>
+          </a:prstGeom>
+          <a:noFill/>
+          <a:ln/>
+        </p:spPr>
+        <p:txBody>
+          <a:bodyPr wrap="square" lIns="0" tIns="0" rIns="0" bIns="0" rtlCol="0" anchor="ctr"/>
+          <a:lstStyle/>
+          <a:p>
+            <a:pPr marL="0" indent="0">
+              <a:buNone/>
+            </a:pPr>
+            <a:r>
+              <a:rPr lang="en-US" sz="1100" b="1" kern="0" spc="150" dirty="0">
+                <a:solidFill>
+                  <a:srgbClr val="007B8C"/>
+                </a:solidFill>
+                <a:latin typeface="Arial" pitchFamily="34" charset="0"/>
+                <a:ea typeface="Arial" pitchFamily="34" charset="-122"/>
+                <a:cs typeface="Arial" pitchFamily="34" charset="-120"/>
+              </a:rPr>
+              <a:t>THE SHIFT</a:t>
+            </a:r>
+            <a:endParaRPr lang="en-US" sz="1100" dirty="0"/>
+          </a:p>
+        </p:txBody>
+      </p:sp>
+      <p:sp>
+        <p:nvSpPr>
+          <p:cNvPr id="11" name="Text 8"/>
+          <p:cNvSpPr/>
+          <p:nvPr/>
+        </p:nvSpPr>
+        <p:spPr>
+          <a:xfrm>
+            <a:off x="640080" y="3319272"/>
+            <a:ext cx="3063240" cy="1005840"/>
+          </a:xfrm>
+          <a:prstGeom prst="rect">
+            <a:avLst/>
+          </a:prstGeom>
+          <a:noFill/>
+          <a:ln/>
+        </p:spPr>
+        <p:txBody>
+          <a:bodyPr wrap="square" lIns="0" tIns="0" rIns="0" bIns="0" rtlCol="0" anchor="ctr"/>
+          <a:lstStyle/>
+          <a:p>
+            <a:pPr marL="0" indent="0">
+              <a:lnSpc>
+                <a:spcPct val="110000"/>
+              </a:lnSpc>
+              <a:buNone/>
+            </a:pPr>
+            <a:r>
+              <a:rPr lang="en-US" sz="1200" dirty="0">
+                <a:solidFill>
+                  <a:srgbClr val="EEEFF0"/>
+                </a:solidFill>
+                <a:latin typeface="Arial" pitchFamily="34" charset="0"/>
+                <a:ea typeface="Arial" pitchFamily="34" charset="-122"/>
+                <a:cs typeface="Arial" pitchFamily="34" charset="-120"/>
+              </a:rPr>
+              <a:t>Once the gap closes, the Asset Menu's metadata schema doubles as a tool schema — the Agent plans and chains its own calls, not one-shot matching.</a:t>
+            </a:r>
+            <a:endParaRPr lang="en-US" sz="1200" dirty="0"/>
+          </a:p>
+        </p:txBody>
+      </p:sp>
+      <p:sp>
+        <p:nvSpPr>
+          <p:cNvPr id="12" name="Shape 9"/>
+          <p:cNvSpPr/>
+          <p:nvPr/>
+        </p:nvSpPr>
+        <p:spPr>
+          <a:xfrm>
+            <a:off x="457200" y="4526280"/>
+            <a:ext cx="54864" cy="868680"/>
+          </a:xfrm>
+          <a:prstGeom prst="rect">
+            <a:avLst/>
+          </a:prstGeom>
+          <a:solidFill>
+            <a:srgbClr val="0098C7"/>
+          </a:solidFill>
+          <a:ln/>
+        </p:spPr>
+        <p:txBody>
+          <a:bodyPr/>
+          <a:lstStyle/>
+          <a:p>
+            <a:endParaRPr lang="en-US"/>
+          </a:p>
+        </p:txBody>
+      </p:sp>
+      <p:sp>
+        <p:nvSpPr>
+          <p:cNvPr id="13" name="Text 10"/>
+          <p:cNvSpPr/>
+          <p:nvPr/>
+        </p:nvSpPr>
+        <p:spPr>
+          <a:xfrm>
+            <a:off x="640080" y="4526280"/>
+            <a:ext cx="3108960" cy="237744"/>
+          </a:xfrm>
+          <a:prstGeom prst="rect">
+            <a:avLst/>
+          </a:prstGeom>
+          <a:noFill/>
+          <a:ln/>
+        </p:spPr>
+        <p:txBody>
+          <a:bodyPr wrap="square" lIns="0" tIns="0" rIns="0" bIns="0" rtlCol="0" anchor="ctr"/>
+          <a:lstStyle/>
+          <a:p>
+            <a:pPr marL="0" indent="0">
+              <a:buNone/>
+            </a:pPr>
+            <a:r>
+              <a:rPr lang="en-US" sz="1100" b="1" kern="0" spc="150" dirty="0">
+                <a:solidFill>
+                  <a:srgbClr val="0098C7"/>
+                </a:solidFill>
+                <a:latin typeface="Arial" pitchFamily="34" charset="0"/>
+                <a:ea typeface="Arial" pitchFamily="34" charset="-122"/>
+                <a:cs typeface="Arial" pitchFamily="34" charset="-120"/>
+              </a:rPr>
+              <a:t>WHAT MUST NOT CHANGE</a:t>
+            </a:r>
+            <a:endParaRPr lang="en-US" sz="1100" dirty="0"/>
+          </a:p>
+        </p:txBody>
+      </p:sp>
+      <p:sp>
+        <p:nvSpPr>
+          <p:cNvPr id="14" name="Text 11"/>
+          <p:cNvSpPr/>
+          <p:nvPr/>
+        </p:nvSpPr>
+        <p:spPr>
+          <a:xfrm>
+            <a:off x="640080" y="4782312"/>
+            <a:ext cx="3063240" cy="502920"/>
+          </a:xfrm>
+          <a:prstGeom prst="rect">
+            <a:avLst/>
+          </a:prstGeom>
+          <a:noFill/>
+          <a:ln/>
+        </p:spPr>
+        <p:txBody>
+          <a:bodyPr wrap="square" lIns="0" tIns="0" rIns="0" bIns="0" rtlCol="0" anchor="ctr"/>
+          <a:lstStyle/>
+          <a:p>
+            <a:pPr marL="0" indent="0">
+              <a:lnSpc>
+                <a:spcPct val="110000"/>
+              </a:lnSpc>
+              <a:buNone/>
+            </a:pPr>
+            <a:r>
+              <a:rPr lang="en-US" sz="1150" dirty="0">
+                <a:solidFill>
+                  <a:srgbClr val="EEEFF0"/>
+                </a:solidFill>
+                <a:latin typeface="Arial" pitchFamily="34" charset="0"/>
+                <a:ea typeface="Arial" pitchFamily="34" charset="-122"/>
+                <a:cs typeface="Arial" pitchFamily="34" charset="-120"/>
+              </a:rPr>
+              <a:t>The sandbox trial-run + human-confirmation gate stays mandatory, no matter how capable the model gets.</a:t>
+            </a:r>
+            <a:endParaRPr lang="en-US" sz="1150" dirty="0"/>
+          </a:p>
+        </p:txBody>
+      </p:sp>
+      <p:sp>
+        <p:nvSpPr>
+          <p:cNvPr id="15" name="Shape 12"/>
+          <p:cNvSpPr/>
+          <p:nvPr/>
+        </p:nvSpPr>
+        <p:spPr>
+          <a:xfrm>
+            <a:off x="457200" y="5623560"/>
+            <a:ext cx="3337560" cy="914400"/>
+          </a:xfrm>
+          <a:prstGeom prst="roundRect">
+            <a:avLst>
+              <a:gd name="adj" fmla="val 8000"/>
+            </a:avLst>
+          </a:prstGeom>
+          <a:solidFill>
+            <a:srgbClr val="3B4652"/>
+          </a:solidFill>
+          <a:ln w="9525">
+            <a:solidFill>
+              <a:srgbClr val="0098C7"/>
+            </a:solidFill>
+            <a:prstDash val="solid"/>
+          </a:ln>
+        </p:spPr>
+        <p:txBody>
+          <a:bodyPr/>
+          <a:lstStyle/>
+          <a:p>
+            <a:endParaRPr lang="en-US"/>
+          </a:p>
+        </p:txBody>
+      </p:sp>
+      <p:sp>
+        <p:nvSpPr>
+          <p:cNvPr id="16" name="Text 13"/>
+          <p:cNvSpPr/>
+          <p:nvPr/>
+        </p:nvSpPr>
+        <p:spPr>
+          <a:xfrm>
+            <a:off x="658368" y="5742432"/>
+            <a:ext cx="2971800" cy="685800"/>
+          </a:xfrm>
+          <a:prstGeom prst="rect">
+            <a:avLst/>
+          </a:prstGeom>
+          <a:noFill/>
+          <a:ln/>
+        </p:spPr>
+        <p:txBody>
+          <a:bodyPr wrap="square" lIns="0" tIns="0" rIns="0" bIns="0" rtlCol="0" anchor="t"/>
+          <a:lstStyle/>
+          <a:p>
+            <a:pPr marL="0" indent="0">
+              <a:buNone/>
+            </a:pPr>
+            <a:r>
+              <a:rPr lang="en-US" sz="1050" b="1" kern="0" spc="150" dirty="0">
+                <a:solidFill>
+                  <a:srgbClr val="0098C7"/>
+                </a:solidFill>
+                <a:latin typeface="Arial" pitchFamily="34" charset="0"/>
+                <a:ea typeface="Arial" pitchFamily="34" charset="-122"/>
+                <a:cs typeface="Arial" pitchFamily="34" charset="-120"/>
+              </a:rPr>
+              <a:t>STATUS</a:t>
+            </a:r>
+            <a:endParaRPr lang="en-US" sz="1050" dirty="0"/>
+          </a:p>
+          <a:p>
+            <a:pPr marL="0" indent="0">
+              <a:buNone/>
+            </a:pPr>
+            <a:r>
+              <a:rPr lang="en-US" sz="1300" b="1" dirty="0">
+                <a:solidFill>
+                  <a:srgbClr val="FFFFFF"/>
+                </a:solidFill>
+                <a:latin typeface="Arial" pitchFamily="34" charset="0"/>
+                <a:ea typeface="Arial" pitchFamily="34" charset="-122"/>
+                <a:cs typeface="Arial" pitchFamily="34" charset="-120"/>
+              </a:rPr>
+              <a:t>Long-term direction — not scheduled</a:t>
+            </a:r>
+            <a:endParaRPr lang="en-US" sz="1050" dirty="0"/>
+          </a:p>
+        </p:txBody>
+      </p:sp>
+      <p:sp>
+        <p:nvSpPr>
+          <p:cNvPr id="17" name="Text 14"/>
+          <p:cNvSpPr/>
+          <p:nvPr/>
+        </p:nvSpPr>
+        <p:spPr>
+          <a:xfrm>
+            <a:off x="4572000" y="365760"/>
+            <a:ext cx="7223760" cy="365760"/>
+          </a:xfrm>
+          <a:prstGeom prst="rect">
+            <a:avLst/>
+          </a:prstGeom>
+          <a:noFill/>
+          <a:ln/>
+        </p:spPr>
+        <p:txBody>
+          <a:bodyPr wrap="square" lIns="0" tIns="0" rIns="0" bIns="0" rtlCol="0" anchor="ctr"/>
+          <a:lstStyle/>
+          <a:p>
+            <a:pPr marL="0" indent="0">
+              <a:buNone/>
+            </a:pPr>
+            <a:r>
+              <a:rPr lang="en-US" sz="1900" b="1" dirty="0">
+                <a:solidFill>
+                  <a:srgbClr val="005C8A"/>
+                </a:solidFill>
+                <a:latin typeface="Arial" pitchFamily="34" charset="0"/>
+                <a:ea typeface="Arial" pitchFamily="34" charset="-122"/>
+                <a:cs typeface="Arial" pitchFamily="34" charset="-120"/>
+              </a:rPr>
+              <a:t>HOW IT WORKS — LONG-TERM PLAN</a:t>
+            </a:r>
+            <a:endParaRPr lang="en-US" sz="1900" dirty="0"/>
+          </a:p>
+        </p:txBody>
+      </p:sp>
+      <p:sp>
+        <p:nvSpPr>
+          <p:cNvPr id="18" name="Text 15"/>
+          <p:cNvSpPr/>
+          <p:nvPr/>
+        </p:nvSpPr>
+        <p:spPr>
+          <a:xfrm>
+            <a:off x="4572000" y="749808"/>
+            <a:ext cx="7223760" cy="292608"/>
+          </a:xfrm>
+          <a:prstGeom prst="rect">
+            <a:avLst/>
+          </a:prstGeom>
+          <a:noFill/>
+          <a:ln/>
+        </p:spPr>
+        <p:txBody>
+          <a:bodyPr wrap="square" lIns="0" tIns="0" rIns="0" bIns="0" rtlCol="0" anchor="ctr"/>
+          <a:lstStyle/>
+          <a:p>
+            <a:pPr marL="0" indent="0">
+              <a:buNone/>
+            </a:pPr>
+            <a:r>
+              <a:rPr lang="en-US" sz="1250" i="1" dirty="0">
+                <a:solidFill>
+                  <a:srgbClr val="53565A"/>
+                </a:solidFill>
+                <a:latin typeface="Arial" pitchFamily="34" charset="0"/>
+                <a:ea typeface="Arial" pitchFamily="34" charset="-122"/>
+                <a:cs typeface="Arial" pitchFamily="34" charset="-120"/>
+              </a:rPr>
+              <a:t>Agent consumes the Asset Menu directly as callable tools — not yet scheduled</a:t>
+            </a:r>
+            <a:endParaRPr lang="en-US" sz="1250" dirty="0"/>
+          </a:p>
+        </p:txBody>
+      </p:sp>
+      <p:sp>
+        <p:nvSpPr>
+          <p:cNvPr id="19" name="Shape 16"/>
+          <p:cNvSpPr/>
+          <p:nvPr/>
+        </p:nvSpPr>
+        <p:spPr>
+          <a:xfrm>
+            <a:off x="4762500" y="1234440"/>
+            <a:ext cx="3048000" cy="1874520"/>
+          </a:xfrm>
+          <a:prstGeom prst="roundRect">
+            <a:avLst>
+              <a:gd name="adj" fmla="val 5056"/>
+            </a:avLst>
+          </a:prstGeom>
+          <a:solidFill>
+            <a:srgbClr val="FFFFFF"/>
+          </a:solidFill>
+          <a:ln/>
+          <a:effectLst>
+            <a:outerShdw blurRad="88900" dist="25400" dir="5400000" algn="bl" rotWithShape="0">
+              <a:srgbClr val="3B4652">
+                <a:alpha val="12000"/>
+              </a:srgbClr>
+            </a:outerShdw>
+          </a:effectLst>
+        </p:spPr>
+        <p:txBody>
+          <a:bodyPr/>
+          <a:lstStyle/>
+          <a:p>
+            <a:endParaRPr lang="en-US"/>
+          </a:p>
+        </p:txBody>
+      </p:sp>
+      <p:sp>
+        <p:nvSpPr>
+          <p:cNvPr id="20" name="Shape 17"/>
+          <p:cNvSpPr/>
+          <p:nvPr/>
+        </p:nvSpPr>
+        <p:spPr>
+          <a:xfrm>
+            <a:off x="6030468" y="1399032"/>
+            <a:ext cx="512064" cy="512064"/>
+          </a:xfrm>
+          <a:prstGeom prst="ellipse">
+            <a:avLst/>
+          </a:prstGeom>
+          <a:solidFill>
+            <a:srgbClr val="0098C7"/>
+          </a:solidFill>
+          <a:ln/>
+        </p:spPr>
+        <p:txBody>
+          <a:bodyPr/>
+          <a:lstStyle/>
+          <a:p>
+            <a:endParaRPr lang="en-US"/>
+          </a:p>
+        </p:txBody>
+      </p:sp>
+      <p:pic>
+        <p:nvPicPr>
+          <p:cNvPr id="21" name="Image 1" descr="preencoded.png"/>
+          <p:cNvPicPr>
+            <a:picLocks noChangeAspect="1"/>
+          </p:cNvPicPr>
+          <p:nvPr/>
+        </p:nvPicPr>
+        <p:blipFill>
+          <a:blip r:embed="rId3"/>
+          <a:stretch>
+            <a:fillRect/>
+          </a:stretch>
+        </p:blipFill>
+        <p:spPr>
+          <a:xfrm>
+            <a:off x="6140196" y="1508760"/>
+            <a:ext cx="292608" cy="292608"/>
+          </a:xfrm>
+          <a:prstGeom prst="rect">
+            <a:avLst/>
+          </a:prstGeom>
+        </p:spPr>
+      </p:pic>
+      <p:sp>
+        <p:nvSpPr>
+          <p:cNvPr id="22" name="Text 18"/>
+          <p:cNvSpPr/>
+          <p:nvPr/>
+        </p:nvSpPr>
+        <p:spPr>
+          <a:xfrm>
+            <a:off x="4945380" y="2011680"/>
+            <a:ext cx="2682240" cy="457200"/>
+          </a:xfrm>
+          <a:prstGeom prst="rect">
+            <a:avLst/>
+          </a:prstGeom>
+          <a:noFill/>
+          <a:ln/>
+        </p:spPr>
+        <p:txBody>
+          <a:bodyPr wrap="square" lIns="0" tIns="0" rIns="0" bIns="0" rtlCol="0" anchor="t"/>
+          <a:lstStyle/>
+          <a:p>
+            <a:pPr marL="0" indent="0" algn="ctr">
+              <a:buNone/>
+            </a:pPr>
+            <a:r>
+              <a:rPr lang="en-US" sz="1300" b="1" dirty="0">
+                <a:solidFill>
+                  <a:srgbClr val="005C8A"/>
+                </a:solidFill>
+                <a:latin typeface="Arial" pitchFamily="34" charset="0"/>
+                <a:ea typeface="Arial" pitchFamily="34" charset="-122"/>
+                <a:cs typeface="Arial" pitchFamily="34" charset="-120"/>
+              </a:rPr>
+              <a:t>Constrained NL-Classifier</a:t>
+            </a:r>
+            <a:endParaRPr lang="en-US" sz="1300" dirty="0"/>
+          </a:p>
+        </p:txBody>
+      </p:sp>
+      <p:sp>
+        <p:nvSpPr>
+          <p:cNvPr id="23" name="Text 19"/>
+          <p:cNvSpPr/>
+          <p:nvPr/>
+        </p:nvSpPr>
+        <p:spPr>
+          <a:xfrm>
+            <a:off x="4945380" y="2441448"/>
+            <a:ext cx="2682240" cy="594360"/>
+          </a:xfrm>
+          <a:prstGeom prst="rect">
+            <a:avLst/>
+          </a:prstGeom>
+          <a:noFill/>
+          <a:ln/>
+        </p:spPr>
+        <p:txBody>
+          <a:bodyPr wrap="square" lIns="0" tIns="0" rIns="0" bIns="0" rtlCol="0" anchor="t"/>
+          <a:lstStyle/>
+          <a:p>
+            <a:pPr marL="0" indent="0" algn="ctr">
+              <a:lnSpc>
+                <a:spcPct val="105000"/>
+              </a:lnSpc>
+              <a:buNone/>
+            </a:pPr>
+            <a:r>
+              <a:rPr lang="en-US" sz="950" dirty="0">
+                <a:solidFill>
+                  <a:srgbClr val="53565A"/>
+                </a:solidFill>
+                <a:latin typeface="Arial" pitchFamily="34" charset="0"/>
+                <a:ea typeface="Arial" pitchFamily="34" charset="-122"/>
+                <a:cs typeface="Arial" pitchFamily="34" charset="-120"/>
+              </a:rPr>
+              <a:t>Match one template, extract a few parameters — today's narrow, low-risk scope</a:t>
+            </a:r>
+            <a:endParaRPr lang="en-US" sz="950" dirty="0"/>
+          </a:p>
+        </p:txBody>
+      </p:sp>
+      <p:sp>
+        <p:nvSpPr>
+          <p:cNvPr id="24" name="Text 20"/>
+          <p:cNvSpPr/>
+          <p:nvPr/>
+        </p:nvSpPr>
+        <p:spPr>
+          <a:xfrm>
+            <a:off x="8068056" y="1970532"/>
+            <a:ext cx="155448" cy="402336"/>
+          </a:xfrm>
+          <a:prstGeom prst="rect">
+            <a:avLst/>
+          </a:prstGeom>
+          <a:noFill/>
+          <a:ln/>
+        </p:spPr>
+        <p:txBody>
+          <a:bodyPr wrap="square" lIns="0" tIns="0" rIns="0" bIns="0" rtlCol="0" anchor="ctr"/>
+          <a:lstStyle/>
+          <a:p>
+            <a:pPr marL="0" indent="0" algn="ctr">
+              <a:buNone/>
+            </a:pPr>
+            <a:r>
+              <a:rPr lang="en-US" sz="2000" b="1" dirty="0">
+                <a:solidFill>
+                  <a:srgbClr val="53565A"/>
+                </a:solidFill>
+                <a:latin typeface="Arial" pitchFamily="34" charset="0"/>
+                <a:ea typeface="Arial" pitchFamily="34" charset="-122"/>
+                <a:cs typeface="Arial" pitchFamily="34" charset="-120"/>
+              </a:rPr>
+              <a:t>›</a:t>
+            </a:r>
+            <a:endParaRPr lang="en-US" sz="2000" dirty="0"/>
+          </a:p>
+        </p:txBody>
+      </p:sp>
+      <p:sp>
+        <p:nvSpPr>
+          <p:cNvPr id="25" name="Shape 21"/>
+          <p:cNvSpPr/>
+          <p:nvPr/>
+        </p:nvSpPr>
+        <p:spPr>
+          <a:xfrm>
+            <a:off x="8481060" y="1234440"/>
+            <a:ext cx="3048000" cy="1874520"/>
+          </a:xfrm>
+          <a:prstGeom prst="roundRect">
+            <a:avLst>
+              <a:gd name="adj" fmla="val 5056"/>
+            </a:avLst>
+          </a:prstGeom>
+          <a:solidFill>
+            <a:srgbClr val="007B8C"/>
+          </a:solidFill>
+          <a:ln/>
+          <a:effectLst>
+            <a:outerShdw blurRad="88900" dist="25400" dir="5400000" algn="bl" rotWithShape="0">
+              <a:srgbClr val="3B4652">
+                <a:alpha val="12000"/>
+              </a:srgbClr>
+            </a:outerShdw>
+          </a:effectLst>
+        </p:spPr>
+        <p:txBody>
+          <a:bodyPr/>
+          <a:lstStyle/>
+          <a:p>
+            <a:endParaRPr lang="en-US"/>
+          </a:p>
+        </p:txBody>
+      </p:sp>
+      <p:sp>
+        <p:nvSpPr>
+          <p:cNvPr id="26" name="Shape 22"/>
+          <p:cNvSpPr/>
+          <p:nvPr/>
+        </p:nvSpPr>
+        <p:spPr>
+          <a:xfrm>
+            <a:off x="9749028" y="1399032"/>
+            <a:ext cx="512064" cy="512064"/>
+          </a:xfrm>
+          <a:prstGeom prst="ellipse">
+            <a:avLst/>
+          </a:prstGeom>
+          <a:solidFill>
+            <a:srgbClr val="FFFFFF"/>
+          </a:solidFill>
+          <a:ln/>
+        </p:spPr>
+        <p:txBody>
+          <a:bodyPr/>
+          <a:lstStyle/>
+          <a:p>
+            <a:endParaRPr lang="en-US"/>
+          </a:p>
+        </p:txBody>
+      </p:sp>
+      <p:pic>
+        <p:nvPicPr>
+          <p:cNvPr id="27" name="Image 2" descr="preencoded.png"/>
+          <p:cNvPicPr>
+            <a:picLocks noChangeAspect="1"/>
+          </p:cNvPicPr>
+          <p:nvPr/>
+        </p:nvPicPr>
+        <p:blipFill>
+          <a:blip r:embed="rId4"/>
+          <a:stretch>
+            <a:fillRect/>
+          </a:stretch>
+        </p:blipFill>
+        <p:spPr>
+          <a:xfrm>
+            <a:off x="9858756" y="1508760"/>
+            <a:ext cx="292608" cy="292608"/>
+          </a:xfrm>
+          <a:prstGeom prst="rect">
+            <a:avLst/>
+          </a:prstGeom>
+        </p:spPr>
+      </p:pic>
+      <p:sp>
+        <p:nvSpPr>
+          <p:cNvPr id="28" name="Text 23"/>
+          <p:cNvSpPr/>
+          <p:nvPr/>
+        </p:nvSpPr>
+        <p:spPr>
+          <a:xfrm>
+            <a:off x="8663940" y="2011680"/>
+            <a:ext cx="2682240" cy="457200"/>
+          </a:xfrm>
+          <a:prstGeom prst="rect">
+            <a:avLst/>
+          </a:prstGeom>
+          <a:noFill/>
+          <a:ln/>
+        </p:spPr>
+        <p:txBody>
+          <a:bodyPr wrap="square" lIns="0" tIns="0" rIns="0" bIns="0" rtlCol="0" anchor="t"/>
+          <a:lstStyle/>
+          <a:p>
+            <a:pPr marL="0" indent="0" algn="ctr">
+              <a:buNone/>
+            </a:pPr>
+            <a:r>
+              <a:rPr lang="en-US" sz="1300" b="1" dirty="0">
+                <a:solidFill>
+                  <a:srgbClr val="FFFFFF"/>
+                </a:solidFill>
+                <a:latin typeface="Arial" pitchFamily="34" charset="0"/>
+                <a:ea typeface="Arial" pitchFamily="34" charset="-122"/>
+                <a:cs typeface="Arial" pitchFamily="34" charset="-120"/>
+              </a:rPr>
+              <a:t>Tool-Using Agent</a:t>
+            </a:r>
+            <a:endParaRPr lang="en-US" sz="1300" dirty="0"/>
+          </a:p>
+        </p:txBody>
+      </p:sp>
+      <p:sp>
+        <p:nvSpPr>
+          <p:cNvPr id="29" name="Text 24"/>
+          <p:cNvSpPr/>
+          <p:nvPr/>
+        </p:nvSpPr>
+        <p:spPr>
+          <a:xfrm>
+            <a:off x="8663940" y="2441448"/>
+            <a:ext cx="2682240" cy="594360"/>
+          </a:xfrm>
+          <a:prstGeom prst="rect">
+            <a:avLst/>
+          </a:prstGeom>
+          <a:noFill/>
+          <a:ln/>
+        </p:spPr>
+        <p:txBody>
+          <a:bodyPr wrap="square" lIns="0" tIns="0" rIns="0" bIns="0" rtlCol="0" anchor="t"/>
+          <a:lstStyle/>
+          <a:p>
+            <a:pPr marL="0" indent="0" algn="ctr">
+              <a:lnSpc>
+                <a:spcPct val="105000"/>
+              </a:lnSpc>
+              <a:buNone/>
+            </a:pPr>
+            <a:r>
+              <a:rPr lang="en-US" sz="950" dirty="0">
+                <a:solidFill>
+                  <a:srgbClr val="EEEFF0"/>
+                </a:solidFill>
+                <a:latin typeface="Arial" pitchFamily="34" charset="0"/>
+                <a:ea typeface="Arial" pitchFamily="34" charset="-122"/>
+                <a:cs typeface="Arial" pitchFamily="34" charset="-120"/>
+              </a:rPr>
+              <a:t>Plans and chains its own calls across the Asset Menu — once the accuracy gap closes</a:t>
+            </a:r>
+            <a:endParaRPr lang="en-US" sz="950" dirty="0"/>
+          </a:p>
+        </p:txBody>
+      </p:sp>
+      <p:sp>
+        <p:nvSpPr>
+          <p:cNvPr id="42" name="Shape 35"/>
+          <p:cNvSpPr/>
+          <p:nvPr/>
+        </p:nvSpPr>
+        <p:spPr>
+          <a:xfrm>
+            <a:off x="4572000" y="3429000"/>
+            <a:ext cx="2286000" cy="1234440"/>
+          </a:xfrm>
+          <a:prstGeom prst="roundRect">
+            <a:avLst>
+              <a:gd name="adj" fmla="val 5926"/>
+            </a:avLst>
+          </a:prstGeom>
+          <a:solidFill>
+            <a:srgbClr val="FFFFFF"/>
+          </a:solidFill>
+          <a:ln w="12700">
+            <a:solidFill>
+              <a:srgbClr val="EEEFF0"/>
+            </a:solidFill>
+            <a:prstDash val="solid"/>
+          </a:ln>
+        </p:spPr>
+        <p:txBody>
+          <a:bodyPr/>
+          <a:lstStyle/>
+          <a:p>
+            <a:endParaRPr lang="en-US"/>
+          </a:p>
+        </p:txBody>
+      </p:sp>
+      <p:sp>
+        <p:nvSpPr>
+          <p:cNvPr id="43" name="Text 36"/>
+          <p:cNvSpPr/>
+          <p:nvPr/>
+        </p:nvSpPr>
+        <p:spPr>
+          <a:xfrm>
+            <a:off x="4709160" y="3538728"/>
+            <a:ext cx="2011680" cy="502920"/>
+          </a:xfrm>
+          <a:prstGeom prst="rect">
+            <a:avLst/>
+          </a:prstGeom>
+          <a:noFill/>
+          <a:ln/>
+        </p:spPr>
+        <p:txBody>
+          <a:bodyPr wrap="square" lIns="0" tIns="0" rIns="0" bIns="0" rtlCol="0" anchor="ctr"/>
+          <a:lstStyle/>
+          <a:p>
+            <a:pPr marL="0" indent="0" algn="ctr">
+              <a:buNone/>
+            </a:pPr>
+            <a:r>
+              <a:rPr lang="en-US" sz="2000" b="1" dirty="0">
+                <a:solidFill>
+                  <a:srgbClr val="005C8A"/>
+                </a:solidFill>
+                <a:latin typeface="Arial" pitchFamily="34" charset="0"/>
+                <a:ea typeface="Arial" pitchFamily="34" charset="-122"/>
+                <a:cs typeface="Arial" pitchFamily="34" charset="-120"/>
+              </a:rPr>
+              <a:t>GTO Policy</a:t>
+            </a:r>
+            <a:endParaRPr lang="en-US" sz="2000" dirty="0"/>
+          </a:p>
+        </p:txBody>
+      </p:sp>
+      <p:sp>
+        <p:nvSpPr>
+          <p:cNvPr id="44" name="Text 37"/>
+          <p:cNvSpPr/>
+          <p:nvPr/>
+        </p:nvSpPr>
+        <p:spPr>
+          <a:xfrm>
+            <a:off x="4736592" y="4050792"/>
+            <a:ext cx="1956816" cy="576072"/>
+          </a:xfrm>
+          <a:prstGeom prst="rect">
+            <a:avLst/>
+          </a:prstGeom>
+          <a:noFill/>
+          <a:ln/>
+        </p:spPr>
+        <p:txBody>
+          <a:bodyPr wrap="square" lIns="0" tIns="0" rIns="0" bIns="0" rtlCol="0" anchor="t"/>
+          <a:lstStyle/>
+          <a:p>
+            <a:pPr marL="0" indent="0" algn="ctr">
+              <a:lnSpc>
+                <a:spcPct val="105000"/>
+              </a:lnSpc>
+              <a:buNone/>
+            </a:pPr>
+            <a:r>
+              <a:rPr lang="en-US" sz="1050" dirty="0">
+                <a:solidFill>
+                  <a:srgbClr val="53565A"/>
+                </a:solidFill>
+                <a:latin typeface="Arial" pitchFamily="34" charset="0"/>
+                <a:ea typeface="Arial" pitchFamily="34" charset="-122"/>
+                <a:cs typeface="Arial" pitchFamily="34" charset="-120"/>
+              </a:rPr>
+              <a:t>GTO revisits internal routing, or on-prem models close the accuracy gap</a:t>
+            </a:r>
+            <a:endParaRPr lang="en-US" sz="1050" dirty="0"/>
+          </a:p>
+        </p:txBody>
+      </p:sp>
+      <p:sp>
+        <p:nvSpPr>
+          <p:cNvPr id="45" name="Shape 38"/>
+          <p:cNvSpPr/>
+          <p:nvPr/>
+        </p:nvSpPr>
+        <p:spPr>
+          <a:xfrm>
+            <a:off x="7040880" y="3429000"/>
+            <a:ext cx="2286000" cy="1234440"/>
+          </a:xfrm>
+          <a:prstGeom prst="roundRect">
+            <a:avLst>
+              <a:gd name="adj" fmla="val 5926"/>
+            </a:avLst>
+          </a:prstGeom>
+          <a:solidFill>
+            <a:srgbClr val="FFFFFF"/>
+          </a:solidFill>
+          <a:ln w="12700">
+            <a:solidFill>
+              <a:srgbClr val="EEEFF0"/>
+            </a:solidFill>
+            <a:prstDash val="solid"/>
+          </a:ln>
+        </p:spPr>
+        <p:txBody>
+          <a:bodyPr/>
+          <a:lstStyle/>
+          <a:p>
+            <a:endParaRPr lang="en-US"/>
+          </a:p>
+        </p:txBody>
+      </p:sp>
+      <p:sp>
+        <p:nvSpPr>
+          <p:cNvPr id="46" name="Text 39"/>
+          <p:cNvSpPr/>
+          <p:nvPr/>
+        </p:nvSpPr>
+        <p:spPr>
+          <a:xfrm>
+            <a:off x="7178040" y="3538728"/>
+            <a:ext cx="2011680" cy="502920"/>
+          </a:xfrm>
+          <a:prstGeom prst="rect">
+            <a:avLst/>
+          </a:prstGeom>
+          <a:noFill/>
+          <a:ln/>
+        </p:spPr>
+        <p:txBody>
+          <a:bodyPr wrap="square" lIns="0" tIns="0" rIns="0" bIns="0" rtlCol="0" anchor="ctr"/>
+          <a:lstStyle/>
+          <a:p>
+            <a:pPr marL="0" indent="0" algn="ctr">
+              <a:buNone/>
+            </a:pPr>
+            <a:r>
+              <a:rPr lang="en-US" sz="2000" b="1" dirty="0">
+                <a:solidFill>
+                  <a:srgbClr val="005C8A"/>
+                </a:solidFill>
+                <a:latin typeface="Arial" pitchFamily="34" charset="0"/>
+                <a:ea typeface="Arial" pitchFamily="34" charset="-122"/>
+                <a:cs typeface="Arial" pitchFamily="34" charset="-120"/>
+              </a:rPr>
+              <a:t>Maverick</a:t>
+            </a:r>
+            <a:endParaRPr lang="en-US" sz="3000" dirty="0"/>
+          </a:p>
+        </p:txBody>
+      </p:sp>
+      <p:sp>
+        <p:nvSpPr>
+          <p:cNvPr id="47" name="Text 40"/>
+          <p:cNvSpPr/>
+          <p:nvPr/>
+        </p:nvSpPr>
+        <p:spPr>
+          <a:xfrm>
+            <a:off x="7205472" y="4050792"/>
+            <a:ext cx="1956816" cy="576072"/>
+          </a:xfrm>
+          <a:prstGeom prst="rect">
+            <a:avLst/>
+          </a:prstGeom>
+          <a:noFill/>
+          <a:ln/>
+        </p:spPr>
+        <p:txBody>
+          <a:bodyPr wrap="square" lIns="0" tIns="0" rIns="0" bIns="0" rtlCol="0" anchor="t"/>
+          <a:lstStyle/>
+          <a:p>
+            <a:pPr marL="0" indent="0" algn="ctr">
+              <a:lnSpc>
+                <a:spcPct val="105000"/>
+              </a:lnSpc>
+              <a:buNone/>
+            </a:pPr>
+            <a:r>
+              <a:rPr lang="en-US" sz="1050" dirty="0">
+                <a:solidFill>
+                  <a:srgbClr val="53565A"/>
+                </a:solidFill>
+                <a:latin typeface="Arial" pitchFamily="34" charset="0"/>
+                <a:ea typeface="Arial" pitchFamily="34" charset="-122"/>
+                <a:cs typeface="Arial" pitchFamily="34" charset="-120"/>
+              </a:rPr>
+              <a:t>Matures past its current Die Inventory Agent pilot to support tool-chaining</a:t>
+            </a:r>
+            <a:endParaRPr lang="en-US" sz="1050" dirty="0"/>
+          </a:p>
+        </p:txBody>
+      </p:sp>
+      <p:sp>
+        <p:nvSpPr>
+          <p:cNvPr id="48" name="Shape 41"/>
+          <p:cNvSpPr/>
+          <p:nvPr/>
+        </p:nvSpPr>
+        <p:spPr>
+          <a:xfrm>
+            <a:off x="9509760" y="3429000"/>
+            <a:ext cx="2286000" cy="1234440"/>
+          </a:xfrm>
+          <a:prstGeom prst="roundRect">
+            <a:avLst>
+              <a:gd name="adj" fmla="val 5926"/>
+            </a:avLst>
+          </a:prstGeom>
+          <a:solidFill>
+            <a:srgbClr val="FFFFFF"/>
+          </a:solidFill>
+          <a:ln w="12700">
+            <a:solidFill>
+              <a:srgbClr val="EEEFF0"/>
+            </a:solidFill>
+            <a:prstDash val="solid"/>
+          </a:ln>
+        </p:spPr>
+        <p:txBody>
+          <a:bodyPr/>
+          <a:lstStyle/>
+          <a:p>
+            <a:endParaRPr lang="en-US"/>
+          </a:p>
+        </p:txBody>
+      </p:sp>
+      <p:sp>
+        <p:nvSpPr>
+          <p:cNvPr id="49" name="Text 42"/>
+          <p:cNvSpPr/>
+          <p:nvPr/>
+        </p:nvSpPr>
+        <p:spPr>
+          <a:xfrm>
+            <a:off x="9646920" y="3538728"/>
+            <a:ext cx="2011680" cy="502920"/>
+          </a:xfrm>
+          <a:prstGeom prst="rect">
+            <a:avLst/>
+          </a:prstGeom>
+          <a:noFill/>
+          <a:ln/>
+        </p:spPr>
+        <p:txBody>
+          <a:bodyPr wrap="square" lIns="0" tIns="0" rIns="0" bIns="0" rtlCol="0" anchor="ctr"/>
+          <a:lstStyle/>
+          <a:p>
+            <a:pPr marL="0" indent="0" algn="ctr">
+              <a:buNone/>
+            </a:pPr>
+            <a:r>
+              <a:rPr lang="en-US" sz="2000" b="1" dirty="0">
+                <a:solidFill>
+                  <a:srgbClr val="005C8A"/>
+                </a:solidFill>
+                <a:latin typeface="Arial" pitchFamily="34" charset="0"/>
+                <a:ea typeface="Arial" pitchFamily="34" charset="-122"/>
+                <a:cs typeface="Arial" pitchFamily="34" charset="-120"/>
+              </a:rPr>
+              <a:t>Query Corpus</a:t>
+            </a:r>
+            <a:endParaRPr lang="en-US" sz="2000" dirty="0"/>
+          </a:p>
+        </p:txBody>
+      </p:sp>
+      <p:sp>
+        <p:nvSpPr>
+          <p:cNvPr id="50" name="Text 43"/>
+          <p:cNvSpPr/>
+          <p:nvPr/>
+        </p:nvSpPr>
+        <p:spPr>
+          <a:xfrm>
+            <a:off x="9674352" y="4050792"/>
+            <a:ext cx="1956816" cy="576072"/>
+          </a:xfrm>
+          <a:prstGeom prst="rect">
+            <a:avLst/>
+          </a:prstGeom>
+          <a:noFill/>
+          <a:ln/>
+        </p:spPr>
+        <p:txBody>
+          <a:bodyPr wrap="square" lIns="0" tIns="0" rIns="0" bIns="0" rtlCol="0" anchor="t"/>
+          <a:lstStyle/>
+          <a:p>
+            <a:pPr marL="0" indent="0" algn="ctr">
+              <a:lnSpc>
+                <a:spcPct val="105000"/>
+              </a:lnSpc>
+              <a:buNone/>
+            </a:pPr>
+            <a:r>
+              <a:rPr lang="en-US" sz="1050" dirty="0">
+                <a:solidFill>
+                  <a:srgbClr val="53565A"/>
+                </a:solidFill>
+                <a:latin typeface="Arial" pitchFamily="34" charset="0"/>
+                <a:ea typeface="Arial" pitchFamily="34" charset="-122"/>
+                <a:cs typeface="Arial" pitchFamily="34" charset="-120"/>
+              </a:rPr>
+              <a:t>Confirmed-query corpus, large enough to regression-test a wider agent</a:t>
+            </a:r>
+            <a:endParaRPr lang="en-US" sz="1050" dirty="0"/>
+          </a:p>
+        </p:txBody>
+      </p:sp>
+      <p:sp>
+        <p:nvSpPr>
+          <p:cNvPr id="51" name="Shape 44"/>
+          <p:cNvSpPr/>
+          <p:nvPr/>
+        </p:nvSpPr>
+        <p:spPr>
+          <a:xfrm>
+            <a:off x="4572000" y="5029200"/>
+            <a:ext cx="7223760" cy="1417320"/>
+          </a:xfrm>
+          <a:prstGeom prst="rect">
+            <a:avLst/>
+          </a:prstGeom>
+          <a:solidFill>
+            <a:srgbClr val="EEEFF0"/>
+          </a:solidFill>
+          <a:ln/>
+        </p:spPr>
+        <p:txBody>
+          <a:bodyPr/>
+          <a:lstStyle/>
+          <a:p>
+            <a:endParaRPr lang="en-US"/>
+          </a:p>
+        </p:txBody>
+      </p:sp>
+      <p:pic>
+        <p:nvPicPr>
+          <p:cNvPr id="52" name="Image 5" descr="preencoded.png"/>
+          <p:cNvPicPr>
+            <a:picLocks noChangeAspect="1"/>
+          </p:cNvPicPr>
+          <p:nvPr/>
+        </p:nvPicPr>
+        <p:blipFill>
+          <a:blip r:embed="rId5"/>
+          <a:stretch>
+            <a:fillRect/>
+          </a:stretch>
+        </p:blipFill>
+        <p:spPr>
+          <a:xfrm>
+            <a:off x="4800600" y="5193792"/>
+            <a:ext cx="365760" cy="365760"/>
+          </a:xfrm>
+          <a:prstGeom prst="rect">
+            <a:avLst/>
+          </a:prstGeom>
+        </p:spPr>
+      </p:pic>
+      <p:sp>
+        <p:nvSpPr>
+          <p:cNvPr id="53" name="Text 45"/>
+          <p:cNvSpPr/>
+          <p:nvPr/>
+        </p:nvSpPr>
+        <p:spPr>
+          <a:xfrm>
+            <a:off x="5285232" y="5166360"/>
+            <a:ext cx="2743200" cy="365760"/>
+          </a:xfrm>
+          <a:prstGeom prst="rect">
+            <a:avLst/>
+          </a:prstGeom>
+          <a:noFill/>
+          <a:ln/>
+        </p:spPr>
+        <p:txBody>
+          <a:bodyPr wrap="square" lIns="0" tIns="0" rIns="0" bIns="0" rtlCol="0" anchor="ctr"/>
+          <a:lstStyle/>
+          <a:p>
+            <a:pPr marL="0" indent="0">
+              <a:buNone/>
+            </a:pPr>
+            <a:r>
+              <a:rPr lang="en-US" sz="1250" b="1" kern="0" spc="100" dirty="0">
+                <a:solidFill>
+                  <a:srgbClr val="005C8A"/>
+                </a:solidFill>
+                <a:latin typeface="Arial" pitchFamily="34" charset="0"/>
+                <a:ea typeface="Arial" pitchFamily="34" charset="-122"/>
+                <a:cs typeface="Arial" pitchFamily="34" charset="-120"/>
+              </a:rPr>
+              <a:t>NOT A V1/V2 DEPENDENCY</a:t>
+            </a:r>
+            <a:endParaRPr lang="en-US" sz="1250" dirty="0"/>
+          </a:p>
+        </p:txBody>
+      </p:sp>
+      <p:sp>
+        <p:nvSpPr>
+          <p:cNvPr id="54" name="Text 46"/>
+          <p:cNvSpPr/>
+          <p:nvPr/>
+        </p:nvSpPr>
+        <p:spPr>
+          <a:xfrm>
+            <a:off x="4800600" y="5596128"/>
+            <a:ext cx="6766560" cy="425677"/>
+          </a:xfrm>
+          <a:prstGeom prst="rect">
+            <a:avLst/>
+          </a:prstGeom>
+          <a:noFill/>
+          <a:ln/>
+        </p:spPr>
+        <p:txBody>
+          <a:bodyPr wrap="square" lIns="0" tIns="0" rIns="0" bIns="0" rtlCol="0" anchor="t"/>
+          <a:lstStyle/>
+          <a:p>
+            <a:pPr marL="342900" indent="-342900">
+              <a:lnSpc>
+                <a:spcPct val="108000"/>
+              </a:lnSpc>
+              <a:buSzPct val="100000"/>
+              <a:buChar char="▸"/>
+            </a:pPr>
+            <a:r>
+              <a:rPr lang="en-US" sz="1100" dirty="0">
+                <a:solidFill>
+                  <a:srgbClr val="3B4652"/>
+                </a:solidFill>
+                <a:latin typeface="Arial" pitchFamily="34" charset="0"/>
+                <a:ea typeface="Arial" pitchFamily="34" charset="-122"/>
+                <a:cs typeface="Arial" pitchFamily="34" charset="-120"/>
+              </a:rPr>
+              <a:t>Design the Asset Menu's metadata schema tool-call-ready now</a:t>
+            </a:r>
+            <a:endParaRPr lang="en-US" sz="1100" dirty="0"/>
+          </a:p>
+          <a:p>
+            <a:pPr marL="342900" indent="-342900">
+              <a:lnSpc>
+                <a:spcPct val="108000"/>
+              </a:lnSpc>
+              <a:buSzPct val="100000"/>
+              <a:buChar char="▸"/>
+            </a:pPr>
+            <a:r>
+              <a:rPr lang="en-US" sz="1100" dirty="0">
+                <a:solidFill>
+                  <a:srgbClr val="3B4652"/>
+                </a:solidFill>
+                <a:latin typeface="Arial" pitchFamily="34" charset="0"/>
+                <a:ea typeface="Arial" pitchFamily="34" charset="-122"/>
+                <a:cs typeface="Arial" pitchFamily="34" charset="-120"/>
+              </a:rPr>
+              <a:t>Nothing acts on it until GTO policy or on-prem model accuracy actually closes the gap</a:t>
             </a:r>
             <a:endParaRPr lang="en-US" sz="1100" dirty="0"/>
           </a:p>

--- a/brainstorm/QueryCopilot_Highlight.pptx
+++ b/brainstorm/QueryCopilot_Highlight.pptx
@@ -8,8 +8,8 @@
     <p:notesMasterId r:id="rId4"/>
   </p:notesMasterIdLst>
   <p:sldIdLst>
-    <p:sldId id="2147481535" r:id="rId2"/>
-    <p:sldId id="2147481536" r:id="rId3"/>
+    <p:sldId id="2147481539" r:id="rId2"/>
+    <p:sldId id="2147481540" r:id="rId3"/>
   </p:sldIdLst>
   <p:sldSz cx="12192000" cy="6858000"/>
   <p:notesSz cx="6858000" cy="12192000"/>
@@ -243,7 +243,13 @@
   <p:cSld>
     <p:spTree>
       <p:nvGrpSpPr>
-        <p:cNvPr id="1" name=""/>
+        <p:cNvPr id="1" name="">
+          <a:extLst>
+            <a:ext uri="{FF2B5EF4-FFF2-40B4-BE49-F238E27FC236}">
+              <a16:creationId xmlns:a16="http://schemas.microsoft.com/office/drawing/2014/main" id="{7821CEA5-320B-D9A6-11B1-9021CAEED512}"/>
+            </a:ext>
+          </a:extLst>
+        </p:cNvPr>
         <p:cNvGrpSpPr/>
         <p:nvPr/>
       </p:nvGrpSpPr>
@@ -257,7 +263,13 @@
       </p:grpSpPr>
       <p:sp>
         <p:nvSpPr>
-          <p:cNvPr id="2" name="Slide Image Placeholder 1"/>
+          <p:cNvPr id="2" name="Slide Image Placeholder 1">
+            <a:extLst>
+              <a:ext uri="{FF2B5EF4-FFF2-40B4-BE49-F238E27FC236}">
+                <a16:creationId xmlns:a16="http://schemas.microsoft.com/office/drawing/2014/main" id="{316F7896-555C-A7EF-ED3D-45EEB02F11EA}"/>
+              </a:ext>
+            </a:extLst>
+          </p:cNvPr>
           <p:cNvSpPr>
             <a:spLocks noGrp="1" noRot="1" noChangeAspect="1"/>
           </p:cNvSpPr>
@@ -269,7 +281,13 @@
       </p:sp>
       <p:sp>
         <p:nvSpPr>
-          <p:cNvPr id="3" name="Notes Placeholder 2"/>
+          <p:cNvPr id="3" name="Notes Placeholder 2">
+            <a:extLst>
+              <a:ext uri="{FF2B5EF4-FFF2-40B4-BE49-F238E27FC236}">
+                <a16:creationId xmlns:a16="http://schemas.microsoft.com/office/drawing/2014/main" id="{AE81F024-1802-183D-41D4-06269750263A}"/>
+              </a:ext>
+            </a:extLst>
+          </p:cNvPr>
           <p:cNvSpPr>
             <a:spLocks noGrp="1"/>
           </p:cNvSpPr>
@@ -288,7 +306,13 @@
       </p:sp>
       <p:sp>
         <p:nvSpPr>
-          <p:cNvPr id="4" name="Slide Number Placeholder 3"/>
+          <p:cNvPr id="4" name="Slide Number Placeholder 3">
+            <a:extLst>
+              <a:ext uri="{FF2B5EF4-FFF2-40B4-BE49-F238E27FC236}">
+                <a16:creationId xmlns:a16="http://schemas.microsoft.com/office/drawing/2014/main" id="{815D123E-32E4-643A-7E6F-EA68DE86C261}"/>
+              </a:ext>
+            </a:extLst>
+          </p:cNvPr>
           <p:cNvSpPr>
             <a:spLocks noGrp="1"/>
           </p:cNvSpPr>
@@ -312,7 +336,7 @@
     </p:spTree>
     <p:extLst>
       <p:ext uri="{BB962C8B-B14F-4D97-AF65-F5344CB8AC3E}">
-        <p14:creationId xmlns:p14="http://schemas.microsoft.com/office/powerpoint/2010/main" val="1024086991"/>
+        <p14:creationId xmlns:p14="http://schemas.microsoft.com/office/powerpoint/2010/main" val="2678418611"/>
       </p:ext>
     </p:extLst>
   </p:cSld>
@@ -639,7 +663,13 @@
   <p:cSld>
     <p:spTree>
       <p:nvGrpSpPr>
-        <p:cNvPr id="1" name=""/>
+        <p:cNvPr id="1" name="">
+          <a:extLst>
+            <a:ext uri="{FF2B5EF4-FFF2-40B4-BE49-F238E27FC236}">
+              <a16:creationId xmlns:a16="http://schemas.microsoft.com/office/drawing/2014/main" id="{1CFDB5B6-4891-B265-19CA-9EDCB827E2F0}"/>
+            </a:ext>
+          </a:extLst>
+        </p:cNvPr>
         <p:cNvGrpSpPr/>
         <p:nvPr/>
       </p:nvGrpSpPr>
@@ -653,7 +683,13 @@
       </p:grpSpPr>
       <p:sp>
         <p:nvSpPr>
-          <p:cNvPr id="2" name="Shape 0"/>
+          <p:cNvPr id="2" name="Shape 0">
+            <a:extLst>
+              <a:ext uri="{FF2B5EF4-FFF2-40B4-BE49-F238E27FC236}">
+                <a16:creationId xmlns:a16="http://schemas.microsoft.com/office/drawing/2014/main" id="{129697F9-0366-CD23-47BD-C7EC0214986A}"/>
+              </a:ext>
+            </a:extLst>
+          </p:cNvPr>
           <p:cNvSpPr/>
           <p:nvPr/>
         </p:nvSpPr>
@@ -674,13 +710,19 @@
           <a:bodyPr/>
           <a:lstStyle/>
           <a:p>
-            <a:endParaRPr lang="en-US"/>
-          </a:p>
-        </p:txBody>
-      </p:sp>
-      <p:sp>
-        <p:nvSpPr>
-          <p:cNvPr id="3" name="Shape 1"/>
+            <a:endParaRPr lang="en-US" dirty="0"/>
+          </a:p>
+        </p:txBody>
+      </p:sp>
+      <p:sp>
+        <p:nvSpPr>
+          <p:cNvPr id="3" name="Shape 1">
+            <a:extLst>
+              <a:ext uri="{FF2B5EF4-FFF2-40B4-BE49-F238E27FC236}">
+                <a16:creationId xmlns:a16="http://schemas.microsoft.com/office/drawing/2014/main" id="{C50A5A33-CFD9-357A-7D14-774E146637BE}"/>
+              </a:ext>
+            </a:extLst>
+          </p:cNvPr>
           <p:cNvSpPr/>
           <p:nvPr/>
         </p:nvSpPr>
@@ -707,7 +749,13 @@
       </p:sp>
       <p:pic>
         <p:nvPicPr>
-          <p:cNvPr id="4" name="Image 0" descr="preencoded.png"/>
+          <p:cNvPr id="4" name="Image 0" descr="preencoded.png">
+            <a:extLst>
+              <a:ext uri="{FF2B5EF4-FFF2-40B4-BE49-F238E27FC236}">
+                <a16:creationId xmlns:a16="http://schemas.microsoft.com/office/drawing/2014/main" id="{CE91E3B9-C0FD-3699-F06A-8FE529B49331}"/>
+              </a:ext>
+            </a:extLst>
+          </p:cNvPr>
           <p:cNvPicPr>
             <a:picLocks noChangeAspect="1"/>
           </p:cNvPicPr>
@@ -731,7 +779,13 @@
       </p:pic>
       <p:sp>
         <p:nvSpPr>
-          <p:cNvPr id="5" name="Text 2"/>
+          <p:cNvPr id="5" name="Text 2">
+            <a:extLst>
+              <a:ext uri="{FF2B5EF4-FFF2-40B4-BE49-F238E27FC236}">
+                <a16:creationId xmlns:a16="http://schemas.microsoft.com/office/drawing/2014/main" id="{91B8DEFE-186C-1702-D52E-3BBA278B3AAD}"/>
+              </a:ext>
+            </a:extLst>
+          </p:cNvPr>
           <p:cNvSpPr/>
           <p:nvPr/>
         </p:nvSpPr>
@@ -762,7 +816,7 @@
                 <a:ea typeface="Arial" pitchFamily="34" charset="-122"/>
                 <a:cs typeface="Arial" pitchFamily="34" charset="-120"/>
               </a:rPr>
-              <a:t>Custom QUERY COPILOT</a:t>
+              <a:t>WSD Data SaaS Query COPILOT</a:t>
             </a:r>
             <a:endParaRPr lang="en-US" sz="2500" dirty="0"/>
           </a:p>
@@ -770,13 +824,19 @@
       </p:sp>
       <p:sp>
         <p:nvSpPr>
-          <p:cNvPr id="6" name="Text 3"/>
-          <p:cNvSpPr/>
-          <p:nvPr/>
-        </p:nvSpPr>
-        <p:spPr>
-          <a:xfrm>
-            <a:off x="457200" y="1170432"/>
+          <p:cNvPr id="6" name="Text 3">
+            <a:extLst>
+              <a:ext uri="{FF2B5EF4-FFF2-40B4-BE49-F238E27FC236}">
+                <a16:creationId xmlns:a16="http://schemas.microsoft.com/office/drawing/2014/main" id="{34DD65E6-CB9F-B52C-4A42-857C45D59B5F}"/>
+              </a:ext>
+            </a:extLst>
+          </p:cNvPr>
+          <p:cNvSpPr/>
+          <p:nvPr/>
+        </p:nvSpPr>
+        <p:spPr>
+          <a:xfrm>
+            <a:off x="434340" y="1225296"/>
             <a:ext cx="3337560" cy="365760"/>
           </a:xfrm>
           <a:prstGeom prst="rect">
@@ -801,7 +861,7 @@
                 <a:ea typeface="Arial" pitchFamily="34" charset="-122"/>
                 <a:cs typeface="Arial" pitchFamily="34" charset="-120"/>
               </a:rPr>
-              <a:t>NL → SQL Data Request Assistant for WSD</a:t>
+              <a:t>NL → SQL Data Request Assistant for WSD Data SaaS Backbone</a:t>
             </a:r>
             <a:endParaRPr lang="en-US" sz="1350" dirty="0"/>
           </a:p>
@@ -809,7 +869,13 @@
       </p:sp>
       <p:sp>
         <p:nvSpPr>
-          <p:cNvPr id="7" name="Text 4"/>
+          <p:cNvPr id="7" name="Text 4">
+            <a:extLst>
+              <a:ext uri="{FF2B5EF4-FFF2-40B4-BE49-F238E27FC236}">
+                <a16:creationId xmlns:a16="http://schemas.microsoft.com/office/drawing/2014/main" id="{1B994457-28BF-C1F5-98A5-D1604A474D7D}"/>
+              </a:ext>
+            </a:extLst>
+          </p:cNvPr>
           <p:cNvSpPr/>
           <p:nvPr/>
         </p:nvSpPr>
@@ -848,7 +914,13 @@
       </p:sp>
       <p:sp>
         <p:nvSpPr>
-          <p:cNvPr id="8" name="Text 5"/>
+          <p:cNvPr id="8" name="Text 5">
+            <a:extLst>
+              <a:ext uri="{FF2B5EF4-FFF2-40B4-BE49-F238E27FC236}">
+                <a16:creationId xmlns:a16="http://schemas.microsoft.com/office/drawing/2014/main" id="{8C5C8F83-8C09-3D48-B441-50D246921196}"/>
+              </a:ext>
+            </a:extLst>
+          </p:cNvPr>
           <p:cNvSpPr/>
           <p:nvPr/>
         </p:nvSpPr>
@@ -882,7 +954,29 @@
                 <a:ea typeface="Arial" pitchFamily="34" charset="-122"/>
                 <a:cs typeface="Arial" pitchFamily="34" charset="-120"/>
               </a:rPr>
-              <a:t>Domain experts hand-write SQL against zDB, gDB, WUDAS, and TUDAS. Slow, requires SQL literacy, and funnels every request through whoever can write the query.</a:t>
+              <a:t>Domain experts hand-write SQL against WSD SaaS (</a:t>
+            </a:r>
+            <a:r>
+              <a:rPr lang="en-US" sz="1250" dirty="0" err="1">
+                <a:solidFill>
+                  <a:srgbClr val="EEEFF0"/>
+                </a:solidFill>
+                <a:latin typeface="Arial" pitchFamily="34" charset="0"/>
+                <a:ea typeface="Arial" pitchFamily="34" charset="-122"/>
+                <a:cs typeface="Arial" pitchFamily="34" charset="-120"/>
+              </a:rPr>
+              <a:t>zDB</a:t>
+            </a:r>
+            <a:r>
+              <a:rPr lang="en-US" sz="1250" dirty="0">
+                <a:solidFill>
+                  <a:srgbClr val="EEEFF0"/>
+                </a:solidFill>
+                <a:latin typeface="Arial" pitchFamily="34" charset="0"/>
+                <a:ea typeface="Arial" pitchFamily="34" charset="-122"/>
+                <a:cs typeface="Arial" pitchFamily="34" charset="-120"/>
+              </a:rPr>
+              <a:t>, gDB, WUDAS, and TUDAS). Slow, requires SQL literacy, and funnels every request through whoever can write the query.</a:t>
             </a:r>
             <a:endParaRPr lang="en-US" sz="1250" dirty="0"/>
           </a:p>
@@ -890,7 +984,13 @@
       </p:sp>
       <p:sp>
         <p:nvSpPr>
-          <p:cNvPr id="9" name="Shape 6"/>
+          <p:cNvPr id="9" name="Shape 6">
+            <a:extLst>
+              <a:ext uri="{FF2B5EF4-FFF2-40B4-BE49-F238E27FC236}">
+                <a16:creationId xmlns:a16="http://schemas.microsoft.com/office/drawing/2014/main" id="{00EEB97A-47E2-0DBE-B1EA-D8B124902E11}"/>
+              </a:ext>
+            </a:extLst>
+          </p:cNvPr>
           <p:cNvSpPr/>
           <p:nvPr/>
         </p:nvSpPr>
@@ -917,7 +1017,13 @@
       </p:sp>
       <p:sp>
         <p:nvSpPr>
-          <p:cNvPr id="10" name="Text 7"/>
+          <p:cNvPr id="10" name="Text 7">
+            <a:extLst>
+              <a:ext uri="{FF2B5EF4-FFF2-40B4-BE49-F238E27FC236}">
+                <a16:creationId xmlns:a16="http://schemas.microsoft.com/office/drawing/2014/main" id="{1567FE47-5AC4-0933-A76E-7114938880D6}"/>
+              </a:ext>
+            </a:extLst>
+          </p:cNvPr>
           <p:cNvSpPr/>
           <p:nvPr/>
         </p:nvSpPr>
@@ -956,7 +1062,13 @@
       </p:sp>
       <p:sp>
         <p:nvSpPr>
-          <p:cNvPr id="11" name="Text 8"/>
+          <p:cNvPr id="11" name="Text 8">
+            <a:extLst>
+              <a:ext uri="{FF2B5EF4-FFF2-40B4-BE49-F238E27FC236}">
+                <a16:creationId xmlns:a16="http://schemas.microsoft.com/office/drawing/2014/main" id="{144BD69E-3B2B-15D0-451B-E80815438EBC}"/>
+              </a:ext>
+            </a:extLst>
+          </p:cNvPr>
           <p:cNvSpPr/>
           <p:nvPr/>
         </p:nvSpPr>
@@ -998,7 +1110,13 @@
       </p:sp>
       <p:sp>
         <p:nvSpPr>
-          <p:cNvPr id="12" name="Shape 9"/>
+          <p:cNvPr id="12" name="Shape 9">
+            <a:extLst>
+              <a:ext uri="{FF2B5EF4-FFF2-40B4-BE49-F238E27FC236}">
+                <a16:creationId xmlns:a16="http://schemas.microsoft.com/office/drawing/2014/main" id="{14D3C8D6-E54A-AA18-5954-34D59D5C5737}"/>
+              </a:ext>
+            </a:extLst>
+          </p:cNvPr>
           <p:cNvSpPr/>
           <p:nvPr/>
         </p:nvSpPr>
@@ -1025,7 +1143,13 @@
       </p:sp>
       <p:sp>
         <p:nvSpPr>
-          <p:cNvPr id="13" name="Text 10"/>
+          <p:cNvPr id="13" name="Text 10">
+            <a:extLst>
+              <a:ext uri="{FF2B5EF4-FFF2-40B4-BE49-F238E27FC236}">
+                <a16:creationId xmlns:a16="http://schemas.microsoft.com/office/drawing/2014/main" id="{EC056128-14BE-D6FA-83DF-D6393EB11DE7}"/>
+              </a:ext>
+            </a:extLst>
+          </p:cNvPr>
           <p:cNvSpPr/>
           <p:nvPr/>
         </p:nvSpPr>
@@ -1064,7 +1188,13 @@
       </p:sp>
       <p:sp>
         <p:nvSpPr>
-          <p:cNvPr id="14" name="Text 11"/>
+          <p:cNvPr id="14" name="Text 11">
+            <a:extLst>
+              <a:ext uri="{FF2B5EF4-FFF2-40B4-BE49-F238E27FC236}">
+                <a16:creationId xmlns:a16="http://schemas.microsoft.com/office/drawing/2014/main" id="{49D43429-3232-BDF8-728D-89EDC0878C4A}"/>
+              </a:ext>
+            </a:extLst>
+          </p:cNvPr>
           <p:cNvSpPr/>
           <p:nvPr/>
         </p:nvSpPr>
@@ -1106,7 +1236,13 @@
       </p:sp>
       <p:sp>
         <p:nvSpPr>
-          <p:cNvPr id="15" name="Shape 12"/>
+          <p:cNvPr id="15" name="Shape 12">
+            <a:extLst>
+              <a:ext uri="{FF2B5EF4-FFF2-40B4-BE49-F238E27FC236}">
+                <a16:creationId xmlns:a16="http://schemas.microsoft.com/office/drawing/2014/main" id="{4C1E0A72-8A83-0B13-2A35-20F0BF2B2126}"/>
+              </a:ext>
+            </a:extLst>
+          </p:cNvPr>
           <p:cNvSpPr/>
           <p:nvPr/>
         </p:nvSpPr>
@@ -1140,7 +1276,13 @@
       </p:sp>
       <p:sp>
         <p:nvSpPr>
-          <p:cNvPr id="16" name="Text 13"/>
+          <p:cNvPr id="16" name="Text 13">
+            <a:extLst>
+              <a:ext uri="{FF2B5EF4-FFF2-40B4-BE49-F238E27FC236}">
+                <a16:creationId xmlns:a16="http://schemas.microsoft.com/office/drawing/2014/main" id="{82244AF7-FD08-61E1-0054-241FFF099B64}"/>
+              </a:ext>
+            </a:extLst>
+          </p:cNvPr>
           <p:cNvSpPr/>
           <p:nvPr/>
         </p:nvSpPr>
@@ -1188,7 +1330,7 @@
                 <a:ea typeface="Arial" pitchFamily="34" charset="-122"/>
                 <a:cs typeface="Arial" pitchFamily="34" charset="-120"/>
               </a:rPr>
-              <a:t>Brainstorming — v1 direction confirmed 2026-08-30</a:t>
+              <a:t>Brainstorming — v1 Proposal @ 2026-09</a:t>
             </a:r>
             <a:endParaRPr lang="en-US" sz="1050" dirty="0"/>
           </a:p>
@@ -1196,13 +1338,19 @@
       </p:sp>
       <p:sp>
         <p:nvSpPr>
-          <p:cNvPr id="17" name="Text 14"/>
-          <p:cNvSpPr/>
-          <p:nvPr/>
-        </p:nvSpPr>
-        <p:spPr>
-          <a:xfrm>
-            <a:off x="4572000" y="365760"/>
+          <p:cNvPr id="17" name="Text 14">
+            <a:extLst>
+              <a:ext uri="{FF2B5EF4-FFF2-40B4-BE49-F238E27FC236}">
+                <a16:creationId xmlns:a16="http://schemas.microsoft.com/office/drawing/2014/main" id="{51324B3B-3BE5-369B-1A19-DDDEFC17C1BC}"/>
+              </a:ext>
+            </a:extLst>
+          </p:cNvPr>
+          <p:cNvSpPr/>
+          <p:nvPr/>
+        </p:nvSpPr>
+        <p:spPr>
+          <a:xfrm>
+            <a:off x="4462272" y="222758"/>
             <a:ext cx="7223760" cy="365760"/>
           </a:xfrm>
           <a:prstGeom prst="rect">
@@ -1227,7 +1375,7 @@
                 <a:ea typeface="Arial" pitchFamily="34" charset="-122"/>
                 <a:cs typeface="Arial" pitchFamily="34" charset="-120"/>
               </a:rPr>
-              <a:t>HOW IT WORKS — RECOMMENDED V1</a:t>
+              <a:t>HOW IT WORKS — V1</a:t>
             </a:r>
             <a:endParaRPr lang="en-US" sz="1900" dirty="0"/>
           </a:p>
@@ -1235,14 +1383,20 @@
       </p:sp>
       <p:sp>
         <p:nvSpPr>
-          <p:cNvPr id="18" name="Text 15"/>
-          <p:cNvSpPr/>
-          <p:nvPr/>
-        </p:nvSpPr>
-        <p:spPr>
-          <a:xfrm>
-            <a:off x="4572000" y="749808"/>
-            <a:ext cx="7223760" cy="292608"/>
+          <p:cNvPr id="18" name="Text 15">
+            <a:extLst>
+              <a:ext uri="{FF2B5EF4-FFF2-40B4-BE49-F238E27FC236}">
+                <a16:creationId xmlns:a16="http://schemas.microsoft.com/office/drawing/2014/main" id="{63D09DCC-7055-09A2-9239-4B5941CCB928}"/>
+              </a:ext>
+            </a:extLst>
+          </p:cNvPr>
+          <p:cNvSpPr/>
+          <p:nvPr/>
+        </p:nvSpPr>
+        <p:spPr>
+          <a:xfrm>
+            <a:off x="4402836" y="728345"/>
+            <a:ext cx="7354824" cy="709930"/>
           </a:xfrm>
           <a:prstGeom prst="rect">
             <a:avLst/>
@@ -1258,7 +1412,7 @@
               <a:buNone/>
             </a:pPr>
             <a:r>
-              <a:rPr lang="en-US" sz="1250" i="1" dirty="0">
+              <a:rPr lang="en-US" sz="1250" b="1" i="1" dirty="0">
                 <a:solidFill>
                   <a:srgbClr val="53565A"/>
                 </a:solidFill>
@@ -1266,21 +1420,58 @@
                 <a:ea typeface="Arial" pitchFamily="34" charset="-122"/>
                 <a:cs typeface="Arial" pitchFamily="34" charset="-120"/>
               </a:rPr>
-              <a:t>Template + Asset-Menu (API + Library) matching — not free-form SQL or fine-tuning</a:t>
-            </a:r>
-            <a:endParaRPr lang="en-US" sz="1250" dirty="0"/>
-          </a:p>
-        </p:txBody>
-      </p:sp>
-      <p:sp>
-        <p:nvSpPr>
-          <p:cNvPr id="19" name="Shape 16"/>
-          <p:cNvSpPr/>
-          <p:nvPr/>
-        </p:nvSpPr>
-        <p:spPr>
-          <a:xfrm>
-            <a:off x="4572000" y="1234440"/>
+              <a:t>Template + WSD Data SaaS Assets-Menu (API + Library) matching </a:t>
+            </a:r>
+          </a:p>
+          <a:p>
+            <a:pPr marL="0" indent="0">
+              <a:buNone/>
+            </a:pPr>
+            <a:r>
+              <a:rPr lang="en-US" sz="1250" b="1" i="1" dirty="0">
+                <a:solidFill>
+                  <a:srgbClr val="53565A"/>
+                </a:solidFill>
+                <a:latin typeface="Arial" pitchFamily="34" charset="0"/>
+                <a:ea typeface="Arial" pitchFamily="34" charset="-122"/>
+                <a:cs typeface="Arial" pitchFamily="34" charset="-120"/>
+              </a:rPr>
+              <a:t>	— NOT Free-form SQL or LLM Fine-tuning</a:t>
+            </a:r>
+          </a:p>
+          <a:p>
+            <a:pPr marL="0" indent="0">
+              <a:buNone/>
+            </a:pPr>
+            <a:r>
+              <a:rPr lang="en-US" sz="1100" i="1" dirty="0">
+                <a:solidFill>
+                  <a:srgbClr val="53565A"/>
+                </a:solidFill>
+                <a:latin typeface="Arial" pitchFamily="34" charset="0"/>
+                <a:ea typeface="Arial" pitchFamily="34" charset="-122"/>
+                <a:cs typeface="Arial" pitchFamily="34" charset="-120"/>
+              </a:rPr>
+              <a:t>Without AI assistance, a consolidation project at this scale and business criticality would be very difficult for this small SW team to deliver within a reasonable time budget</a:t>
+            </a:r>
+          </a:p>
+        </p:txBody>
+      </p:sp>
+      <p:sp>
+        <p:nvSpPr>
+          <p:cNvPr id="19" name="Shape 16">
+            <a:extLst>
+              <a:ext uri="{FF2B5EF4-FFF2-40B4-BE49-F238E27FC236}">
+                <a16:creationId xmlns:a16="http://schemas.microsoft.com/office/drawing/2014/main" id="{2F777904-038E-3C55-210D-182ECDBE5459}"/>
+              </a:ext>
+            </a:extLst>
+          </p:cNvPr>
+          <p:cNvSpPr/>
+          <p:nvPr/>
+        </p:nvSpPr>
+        <p:spPr>
+          <a:xfrm>
+            <a:off x="4572000" y="1723390"/>
             <a:ext cx="1627632" cy="1874520"/>
           </a:xfrm>
           <a:prstGeom prst="roundRect">
@@ -1310,13 +1501,19 @@
       </p:sp>
       <p:sp>
         <p:nvSpPr>
-          <p:cNvPr id="20" name="Shape 17"/>
-          <p:cNvSpPr/>
-          <p:nvPr/>
-        </p:nvSpPr>
-        <p:spPr>
-          <a:xfrm>
-            <a:off x="5129784" y="1399032"/>
+          <p:cNvPr id="20" name="Shape 17">
+            <a:extLst>
+              <a:ext uri="{FF2B5EF4-FFF2-40B4-BE49-F238E27FC236}">
+                <a16:creationId xmlns:a16="http://schemas.microsoft.com/office/drawing/2014/main" id="{95B209D0-D89E-3641-99BE-F8ED195F26C0}"/>
+              </a:ext>
+            </a:extLst>
+          </p:cNvPr>
+          <p:cNvSpPr/>
+          <p:nvPr/>
+        </p:nvSpPr>
+        <p:spPr>
+          <a:xfrm>
+            <a:off x="5129784" y="1887982"/>
             <a:ext cx="512064" cy="512064"/>
           </a:xfrm>
           <a:prstGeom prst="ellipse">
@@ -1337,7 +1534,13 @@
       </p:sp>
       <p:pic>
         <p:nvPicPr>
-          <p:cNvPr id="21" name="Image 1" descr="preencoded.png"/>
+          <p:cNvPr id="21" name="Image 1" descr="preencoded.png">
+            <a:extLst>
+              <a:ext uri="{FF2B5EF4-FFF2-40B4-BE49-F238E27FC236}">
+                <a16:creationId xmlns:a16="http://schemas.microsoft.com/office/drawing/2014/main" id="{CFD1ECA4-2BB3-5053-F1C5-90B04276A488}"/>
+              </a:ext>
+            </a:extLst>
+          </p:cNvPr>
           <p:cNvPicPr>
             <a:picLocks noChangeAspect="1"/>
           </p:cNvPicPr>
@@ -1351,7 +1554,7 @@
         </p:blipFill>
         <p:spPr>
           <a:xfrm>
-            <a:off x="5239512" y="1508760"/>
+            <a:off x="5239512" y="1997710"/>
             <a:ext cx="292608" cy="292608"/>
           </a:xfrm>
           <a:prstGeom prst="rect">
@@ -1361,13 +1564,19 @@
       </p:pic>
       <p:sp>
         <p:nvSpPr>
-          <p:cNvPr id="22" name="Text 18"/>
-          <p:cNvSpPr/>
-          <p:nvPr/>
-        </p:nvSpPr>
-        <p:spPr>
-          <a:xfrm>
-            <a:off x="4663440" y="2011680"/>
+          <p:cNvPr id="22" name="Text 18">
+            <a:extLst>
+              <a:ext uri="{FF2B5EF4-FFF2-40B4-BE49-F238E27FC236}">
+                <a16:creationId xmlns:a16="http://schemas.microsoft.com/office/drawing/2014/main" id="{923C26BD-2ADA-D9DC-2E9A-78D28AE5E86E}"/>
+              </a:ext>
+            </a:extLst>
+          </p:cNvPr>
+          <p:cNvSpPr/>
+          <p:nvPr/>
+        </p:nvSpPr>
+        <p:spPr>
+          <a:xfrm>
+            <a:off x="4663440" y="2500630"/>
             <a:ext cx="1444752" cy="457200"/>
           </a:xfrm>
           <a:prstGeom prst="rect">
@@ -1400,13 +1609,19 @@
       </p:sp>
       <p:sp>
         <p:nvSpPr>
-          <p:cNvPr id="23" name="Text 19"/>
-          <p:cNvSpPr/>
-          <p:nvPr/>
-        </p:nvSpPr>
-        <p:spPr>
-          <a:xfrm>
-            <a:off x="4681728" y="2441448"/>
+          <p:cNvPr id="23" name="Text 19">
+            <a:extLst>
+              <a:ext uri="{FF2B5EF4-FFF2-40B4-BE49-F238E27FC236}">
+                <a16:creationId xmlns:a16="http://schemas.microsoft.com/office/drawing/2014/main" id="{3A3CC50A-5214-331F-4ECE-937BCC8D6589}"/>
+              </a:ext>
+            </a:extLst>
+          </p:cNvPr>
+          <p:cNvSpPr/>
+          <p:nvPr/>
+        </p:nvSpPr>
+        <p:spPr>
+          <a:xfrm>
+            <a:off x="4681728" y="2930398"/>
             <a:ext cx="1408176" cy="594360"/>
           </a:xfrm>
           <a:prstGeom prst="rect">
@@ -1442,13 +1657,19 @@
       </p:sp>
       <p:sp>
         <p:nvSpPr>
-          <p:cNvPr id="24" name="Text 20"/>
-          <p:cNvSpPr/>
-          <p:nvPr/>
-        </p:nvSpPr>
-        <p:spPr>
-          <a:xfrm>
-            <a:off x="6204204" y="1970532"/>
+          <p:cNvPr id="24" name="Text 20">
+            <a:extLst>
+              <a:ext uri="{FF2B5EF4-FFF2-40B4-BE49-F238E27FC236}">
+                <a16:creationId xmlns:a16="http://schemas.microsoft.com/office/drawing/2014/main" id="{A785ED93-6900-7C2E-8BFE-9129AF9DB8DB}"/>
+              </a:ext>
+            </a:extLst>
+          </p:cNvPr>
+          <p:cNvSpPr/>
+          <p:nvPr/>
+        </p:nvSpPr>
+        <p:spPr>
+          <a:xfrm>
+            <a:off x="6204204" y="2459482"/>
             <a:ext cx="155448" cy="402336"/>
           </a:xfrm>
           <a:prstGeom prst="rect">
@@ -1481,13 +1702,19 @@
       </p:sp>
       <p:sp>
         <p:nvSpPr>
-          <p:cNvPr id="25" name="Shape 21"/>
-          <p:cNvSpPr/>
-          <p:nvPr/>
-        </p:nvSpPr>
-        <p:spPr>
-          <a:xfrm>
-            <a:off x="6364224" y="1234440"/>
+          <p:cNvPr id="25" name="Shape 21">
+            <a:extLst>
+              <a:ext uri="{FF2B5EF4-FFF2-40B4-BE49-F238E27FC236}">
+                <a16:creationId xmlns:a16="http://schemas.microsoft.com/office/drawing/2014/main" id="{7F956D6A-D283-5918-7C14-92EBB9BB5FEF}"/>
+              </a:ext>
+            </a:extLst>
+          </p:cNvPr>
+          <p:cNvSpPr/>
+          <p:nvPr/>
+        </p:nvSpPr>
+        <p:spPr>
+          <a:xfrm>
+            <a:off x="6364224" y="1723390"/>
             <a:ext cx="1627632" cy="1874520"/>
           </a:xfrm>
           <a:prstGeom prst="roundRect">
@@ -1517,13 +1744,19 @@
       </p:sp>
       <p:sp>
         <p:nvSpPr>
-          <p:cNvPr id="26" name="Shape 22"/>
-          <p:cNvSpPr/>
-          <p:nvPr/>
-        </p:nvSpPr>
-        <p:spPr>
-          <a:xfrm>
-            <a:off x="6922008" y="1399032"/>
+          <p:cNvPr id="26" name="Shape 22">
+            <a:extLst>
+              <a:ext uri="{FF2B5EF4-FFF2-40B4-BE49-F238E27FC236}">
+                <a16:creationId xmlns:a16="http://schemas.microsoft.com/office/drawing/2014/main" id="{4816342E-173D-BAD6-07B3-FAE4CA1CD00E}"/>
+              </a:ext>
+            </a:extLst>
+          </p:cNvPr>
+          <p:cNvSpPr/>
+          <p:nvPr/>
+        </p:nvSpPr>
+        <p:spPr>
+          <a:xfrm>
+            <a:off x="6922008" y="1887982"/>
             <a:ext cx="512064" cy="512064"/>
           </a:xfrm>
           <a:prstGeom prst="ellipse">
@@ -1544,7 +1777,13 @@
       </p:sp>
       <p:pic>
         <p:nvPicPr>
-          <p:cNvPr id="27" name="Image 2" descr="preencoded.png"/>
+          <p:cNvPr id="27" name="Image 2" descr="preencoded.png">
+            <a:extLst>
+              <a:ext uri="{FF2B5EF4-FFF2-40B4-BE49-F238E27FC236}">
+                <a16:creationId xmlns:a16="http://schemas.microsoft.com/office/drawing/2014/main" id="{943BD6DC-5042-887A-0CEC-1D31FC7BD5B9}"/>
+              </a:ext>
+            </a:extLst>
+          </p:cNvPr>
           <p:cNvPicPr>
             <a:picLocks noChangeAspect="1"/>
           </p:cNvPicPr>
@@ -1558,7 +1797,7 @@
         </p:blipFill>
         <p:spPr>
           <a:xfrm>
-            <a:off x="7031736" y="1508760"/>
+            <a:off x="7031736" y="1997710"/>
             <a:ext cx="292608" cy="292608"/>
           </a:xfrm>
           <a:prstGeom prst="rect">
@@ -1568,13 +1807,19 @@
       </p:pic>
       <p:sp>
         <p:nvSpPr>
-          <p:cNvPr id="28" name="Text 23"/>
-          <p:cNvSpPr/>
-          <p:nvPr/>
-        </p:nvSpPr>
-        <p:spPr>
-          <a:xfrm>
-            <a:off x="6455664" y="2011680"/>
+          <p:cNvPr id="28" name="Text 23">
+            <a:extLst>
+              <a:ext uri="{FF2B5EF4-FFF2-40B4-BE49-F238E27FC236}">
+                <a16:creationId xmlns:a16="http://schemas.microsoft.com/office/drawing/2014/main" id="{BD1E7D4F-1DCC-33D7-AF63-C14E267E6218}"/>
+              </a:ext>
+            </a:extLst>
+          </p:cNvPr>
+          <p:cNvSpPr/>
+          <p:nvPr/>
+        </p:nvSpPr>
+        <p:spPr>
+          <a:xfrm>
+            <a:off x="6455664" y="2500630"/>
             <a:ext cx="1444752" cy="457200"/>
           </a:xfrm>
           <a:prstGeom prst="rect">
@@ -1607,13 +1852,19 @@
       </p:sp>
       <p:sp>
         <p:nvSpPr>
-          <p:cNvPr id="29" name="Text 24"/>
-          <p:cNvSpPr/>
-          <p:nvPr/>
-        </p:nvSpPr>
-        <p:spPr>
-          <a:xfrm>
-            <a:off x="6473952" y="2441448"/>
+          <p:cNvPr id="29" name="Text 24">
+            <a:extLst>
+              <a:ext uri="{FF2B5EF4-FFF2-40B4-BE49-F238E27FC236}">
+                <a16:creationId xmlns:a16="http://schemas.microsoft.com/office/drawing/2014/main" id="{32FC97D0-1165-B987-E7D6-AE4DB73F6EF2}"/>
+              </a:ext>
+            </a:extLst>
+          </p:cNvPr>
+          <p:cNvSpPr/>
+          <p:nvPr/>
+        </p:nvSpPr>
+        <p:spPr>
+          <a:xfrm>
+            <a:off x="6473952" y="2930398"/>
             <a:ext cx="1408176" cy="594360"/>
           </a:xfrm>
           <a:prstGeom prst="rect">
@@ -1641,7 +1892,7 @@
                 <a:ea typeface="Arial" pitchFamily="34" charset="-122"/>
                 <a:cs typeface="Arial" pitchFamily="34" charset="-120"/>
               </a:rPr>
-              <a:t>One shared menu of templates, APIs, and catalogued libraries (~20–30 entries today)</a:t>
+              <a:t>One shared menu of templates, APIs, and catalogued libraries (~20–30 entries targeted for v1)</a:t>
             </a:r>
             <a:endParaRPr lang="en-US" sz="950" dirty="0"/>
           </a:p>
@@ -1649,13 +1900,19 @@
       </p:sp>
       <p:sp>
         <p:nvSpPr>
-          <p:cNvPr id="30" name="Text 25"/>
-          <p:cNvSpPr/>
-          <p:nvPr/>
-        </p:nvSpPr>
-        <p:spPr>
-          <a:xfrm>
-            <a:off x="7996428" y="1970532"/>
+          <p:cNvPr id="30" name="Text 25">
+            <a:extLst>
+              <a:ext uri="{FF2B5EF4-FFF2-40B4-BE49-F238E27FC236}">
+                <a16:creationId xmlns:a16="http://schemas.microsoft.com/office/drawing/2014/main" id="{2EF22B8B-1D45-6E5E-A09A-26ADB956612F}"/>
+              </a:ext>
+            </a:extLst>
+          </p:cNvPr>
+          <p:cNvSpPr/>
+          <p:nvPr/>
+        </p:nvSpPr>
+        <p:spPr>
+          <a:xfrm>
+            <a:off x="7996428" y="2459482"/>
             <a:ext cx="155448" cy="402336"/>
           </a:xfrm>
           <a:prstGeom prst="rect">
@@ -1688,13 +1945,19 @@
       </p:sp>
       <p:sp>
         <p:nvSpPr>
-          <p:cNvPr id="31" name="Shape 26"/>
-          <p:cNvSpPr/>
-          <p:nvPr/>
-        </p:nvSpPr>
-        <p:spPr>
-          <a:xfrm>
-            <a:off x="8156448" y="1234440"/>
+          <p:cNvPr id="31" name="Shape 26">
+            <a:extLst>
+              <a:ext uri="{FF2B5EF4-FFF2-40B4-BE49-F238E27FC236}">
+                <a16:creationId xmlns:a16="http://schemas.microsoft.com/office/drawing/2014/main" id="{247DCE85-31B2-E0B4-69CD-2CAC34807160}"/>
+              </a:ext>
+            </a:extLst>
+          </p:cNvPr>
+          <p:cNvSpPr/>
+          <p:nvPr/>
+        </p:nvSpPr>
+        <p:spPr>
+          <a:xfrm>
+            <a:off x="8156448" y="1723390"/>
             <a:ext cx="1627632" cy="1874520"/>
           </a:xfrm>
           <a:prstGeom prst="roundRect">
@@ -1724,13 +1987,19 @@
       </p:sp>
       <p:sp>
         <p:nvSpPr>
-          <p:cNvPr id="32" name="Shape 27"/>
-          <p:cNvSpPr/>
-          <p:nvPr/>
-        </p:nvSpPr>
-        <p:spPr>
-          <a:xfrm>
-            <a:off x="8714232" y="1399032"/>
+          <p:cNvPr id="32" name="Shape 27">
+            <a:extLst>
+              <a:ext uri="{FF2B5EF4-FFF2-40B4-BE49-F238E27FC236}">
+                <a16:creationId xmlns:a16="http://schemas.microsoft.com/office/drawing/2014/main" id="{09318C15-36BB-D124-B53B-127EFFBC62C7}"/>
+              </a:ext>
+            </a:extLst>
+          </p:cNvPr>
+          <p:cNvSpPr/>
+          <p:nvPr/>
+        </p:nvSpPr>
+        <p:spPr>
+          <a:xfrm>
+            <a:off x="8714232" y="1887982"/>
             <a:ext cx="512064" cy="512064"/>
           </a:xfrm>
           <a:prstGeom prst="ellipse">
@@ -1751,7 +2020,13 @@
       </p:sp>
       <p:pic>
         <p:nvPicPr>
-          <p:cNvPr id="33" name="Image 3" descr="preencoded.png"/>
+          <p:cNvPr id="33" name="Image 3" descr="preencoded.png">
+            <a:extLst>
+              <a:ext uri="{FF2B5EF4-FFF2-40B4-BE49-F238E27FC236}">
+                <a16:creationId xmlns:a16="http://schemas.microsoft.com/office/drawing/2014/main" id="{6E26EC55-00DA-5CE2-CBFE-2524BA330673}"/>
+              </a:ext>
+            </a:extLst>
+          </p:cNvPr>
           <p:cNvPicPr>
             <a:picLocks noChangeAspect="1"/>
           </p:cNvPicPr>
@@ -1765,7 +2040,7 @@
         </p:blipFill>
         <p:spPr>
           <a:xfrm>
-            <a:off x="8823960" y="1508760"/>
+            <a:off x="8823960" y="1997710"/>
             <a:ext cx="292608" cy="292608"/>
           </a:xfrm>
           <a:prstGeom prst="rect">
@@ -1775,13 +2050,19 @@
       </p:pic>
       <p:sp>
         <p:nvSpPr>
-          <p:cNvPr id="34" name="Text 28"/>
-          <p:cNvSpPr/>
-          <p:nvPr/>
-        </p:nvSpPr>
-        <p:spPr>
-          <a:xfrm>
-            <a:off x="8247888" y="2011680"/>
+          <p:cNvPr id="34" name="Text 28">
+            <a:extLst>
+              <a:ext uri="{FF2B5EF4-FFF2-40B4-BE49-F238E27FC236}">
+                <a16:creationId xmlns:a16="http://schemas.microsoft.com/office/drawing/2014/main" id="{736409D6-8039-7C31-1CD2-A0AAB59B9B7C}"/>
+              </a:ext>
+            </a:extLst>
+          </p:cNvPr>
+          <p:cNvSpPr/>
+          <p:nvPr/>
+        </p:nvSpPr>
+        <p:spPr>
+          <a:xfrm>
+            <a:off x="8247888" y="2500630"/>
             <a:ext cx="1444752" cy="457200"/>
           </a:xfrm>
           <a:prstGeom prst="rect">
@@ -1814,13 +2095,19 @@
       </p:sp>
       <p:sp>
         <p:nvSpPr>
-          <p:cNvPr id="35" name="Text 29"/>
-          <p:cNvSpPr/>
-          <p:nvPr/>
-        </p:nvSpPr>
-        <p:spPr>
-          <a:xfrm>
-            <a:off x="8266176" y="2441448"/>
+          <p:cNvPr id="35" name="Text 29">
+            <a:extLst>
+              <a:ext uri="{FF2B5EF4-FFF2-40B4-BE49-F238E27FC236}">
+                <a16:creationId xmlns:a16="http://schemas.microsoft.com/office/drawing/2014/main" id="{40B0E559-23A5-5103-0FE6-E94589EF828B}"/>
+              </a:ext>
+            </a:extLst>
+          </p:cNvPr>
+          <p:cNvSpPr/>
+          <p:nvPr/>
+        </p:nvSpPr>
+        <p:spPr>
+          <a:xfrm>
+            <a:off x="8266176" y="2930398"/>
             <a:ext cx="1408176" cy="594360"/>
           </a:xfrm>
           <a:prstGeom prst="rect">
@@ -1856,13 +2143,19 @@
       </p:sp>
       <p:sp>
         <p:nvSpPr>
-          <p:cNvPr id="36" name="Text 30"/>
-          <p:cNvSpPr/>
-          <p:nvPr/>
-        </p:nvSpPr>
-        <p:spPr>
-          <a:xfrm>
-            <a:off x="9788652" y="1970532"/>
+          <p:cNvPr id="36" name="Text 30">
+            <a:extLst>
+              <a:ext uri="{FF2B5EF4-FFF2-40B4-BE49-F238E27FC236}">
+                <a16:creationId xmlns:a16="http://schemas.microsoft.com/office/drawing/2014/main" id="{0DC86702-5F05-A860-0D66-46C04FF5D729}"/>
+              </a:ext>
+            </a:extLst>
+          </p:cNvPr>
+          <p:cNvSpPr/>
+          <p:nvPr/>
+        </p:nvSpPr>
+        <p:spPr>
+          <a:xfrm>
+            <a:off x="9788652" y="2459482"/>
             <a:ext cx="155448" cy="402336"/>
           </a:xfrm>
           <a:prstGeom prst="rect">
@@ -1895,13 +2188,19 @@
       </p:sp>
       <p:sp>
         <p:nvSpPr>
-          <p:cNvPr id="37" name="Shape 31"/>
-          <p:cNvSpPr/>
-          <p:nvPr/>
-        </p:nvSpPr>
-        <p:spPr>
-          <a:xfrm>
-            <a:off x="9948672" y="1234440"/>
+          <p:cNvPr id="37" name="Shape 31">
+            <a:extLst>
+              <a:ext uri="{FF2B5EF4-FFF2-40B4-BE49-F238E27FC236}">
+                <a16:creationId xmlns:a16="http://schemas.microsoft.com/office/drawing/2014/main" id="{FBE3B97B-E9A0-4BA4-9F6A-EFBF845F2C61}"/>
+              </a:ext>
+            </a:extLst>
+          </p:cNvPr>
+          <p:cNvSpPr/>
+          <p:nvPr/>
+        </p:nvSpPr>
+        <p:spPr>
+          <a:xfrm>
+            <a:off x="9948672" y="1723390"/>
             <a:ext cx="1627632" cy="1874520"/>
           </a:xfrm>
           <a:prstGeom prst="roundRect">
@@ -1931,13 +2230,19 @@
       </p:sp>
       <p:sp>
         <p:nvSpPr>
-          <p:cNvPr id="38" name="Shape 32"/>
-          <p:cNvSpPr/>
-          <p:nvPr/>
-        </p:nvSpPr>
-        <p:spPr>
-          <a:xfrm>
-            <a:off x="10506456" y="1399032"/>
+          <p:cNvPr id="38" name="Shape 32">
+            <a:extLst>
+              <a:ext uri="{FF2B5EF4-FFF2-40B4-BE49-F238E27FC236}">
+                <a16:creationId xmlns:a16="http://schemas.microsoft.com/office/drawing/2014/main" id="{76925576-7A23-7178-B14F-298582E24D03}"/>
+              </a:ext>
+            </a:extLst>
+          </p:cNvPr>
+          <p:cNvSpPr/>
+          <p:nvPr/>
+        </p:nvSpPr>
+        <p:spPr>
+          <a:xfrm>
+            <a:off x="10506456" y="1887982"/>
             <a:ext cx="512064" cy="512064"/>
           </a:xfrm>
           <a:prstGeom prst="ellipse">
@@ -1958,7 +2263,13 @@
       </p:sp>
       <p:pic>
         <p:nvPicPr>
-          <p:cNvPr id="39" name="Image 4" descr="preencoded.png"/>
+          <p:cNvPr id="39" name="Image 4" descr="preencoded.png">
+            <a:extLst>
+              <a:ext uri="{FF2B5EF4-FFF2-40B4-BE49-F238E27FC236}">
+                <a16:creationId xmlns:a16="http://schemas.microsoft.com/office/drawing/2014/main" id="{71780C7C-160A-EF72-D5FD-C5AFD0AB36DA}"/>
+              </a:ext>
+            </a:extLst>
+          </p:cNvPr>
           <p:cNvPicPr>
             <a:picLocks noChangeAspect="1"/>
           </p:cNvPicPr>
@@ -1972,7 +2283,7 @@
         </p:blipFill>
         <p:spPr>
           <a:xfrm>
-            <a:off x="10616184" y="1508760"/>
+            <a:off x="10616184" y="1997710"/>
             <a:ext cx="292608" cy="292608"/>
           </a:xfrm>
           <a:prstGeom prst="rect">
@@ -1982,13 +2293,19 @@
       </p:pic>
       <p:sp>
         <p:nvSpPr>
-          <p:cNvPr id="40" name="Text 33"/>
-          <p:cNvSpPr/>
-          <p:nvPr/>
-        </p:nvSpPr>
-        <p:spPr>
-          <a:xfrm>
-            <a:off x="10040112" y="2011680"/>
+          <p:cNvPr id="40" name="Text 33">
+            <a:extLst>
+              <a:ext uri="{FF2B5EF4-FFF2-40B4-BE49-F238E27FC236}">
+                <a16:creationId xmlns:a16="http://schemas.microsoft.com/office/drawing/2014/main" id="{61EBC79C-AC8E-9F91-005C-FAAABB459DEA}"/>
+              </a:ext>
+            </a:extLst>
+          </p:cNvPr>
+          <p:cNvSpPr/>
+          <p:nvPr/>
+        </p:nvSpPr>
+        <p:spPr>
+          <a:xfrm>
+            <a:off x="10040112" y="2500630"/>
             <a:ext cx="1444752" cy="457200"/>
           </a:xfrm>
           <a:prstGeom prst="rect">
@@ -2021,13 +2338,19 @@
       </p:sp>
       <p:sp>
         <p:nvSpPr>
-          <p:cNvPr id="41" name="Text 34"/>
-          <p:cNvSpPr/>
-          <p:nvPr/>
-        </p:nvSpPr>
-        <p:spPr>
-          <a:xfrm>
-            <a:off x="10058400" y="2441448"/>
+          <p:cNvPr id="41" name="Text 34">
+            <a:extLst>
+              <a:ext uri="{FF2B5EF4-FFF2-40B4-BE49-F238E27FC236}">
+                <a16:creationId xmlns:a16="http://schemas.microsoft.com/office/drawing/2014/main" id="{8073F58E-75C4-6F0C-CC40-9F268BC74F4F}"/>
+              </a:ext>
+            </a:extLst>
+          </p:cNvPr>
+          <p:cNvSpPr/>
+          <p:nvPr/>
+        </p:nvSpPr>
+        <p:spPr>
+          <a:xfrm>
+            <a:off x="10058400" y="2930398"/>
             <a:ext cx="1408176" cy="594360"/>
           </a:xfrm>
           <a:prstGeom prst="rect">
@@ -2063,13 +2386,19 @@
       </p:sp>
       <p:sp>
         <p:nvSpPr>
-          <p:cNvPr id="42" name="Shape 35"/>
-          <p:cNvSpPr/>
-          <p:nvPr/>
-        </p:nvSpPr>
-        <p:spPr>
-          <a:xfrm>
-            <a:off x="4572000" y="3429000"/>
+          <p:cNvPr id="42" name="Shape 35">
+            <a:extLst>
+              <a:ext uri="{FF2B5EF4-FFF2-40B4-BE49-F238E27FC236}">
+                <a16:creationId xmlns:a16="http://schemas.microsoft.com/office/drawing/2014/main" id="{6CBA510E-2B0B-A872-AF85-BC60089206D5}"/>
+              </a:ext>
+            </a:extLst>
+          </p:cNvPr>
+          <p:cNvSpPr/>
+          <p:nvPr/>
+        </p:nvSpPr>
+        <p:spPr>
+          <a:xfrm>
+            <a:off x="4572000" y="3759200"/>
             <a:ext cx="2286000" cy="1234440"/>
           </a:xfrm>
           <a:prstGeom prst="roundRect">
@@ -2097,13 +2426,19 @@
       </p:sp>
       <p:sp>
         <p:nvSpPr>
-          <p:cNvPr id="43" name="Text 36"/>
-          <p:cNvSpPr/>
-          <p:nvPr/>
-        </p:nvSpPr>
-        <p:spPr>
-          <a:xfrm>
-            <a:off x="4709160" y="3538728"/>
+          <p:cNvPr id="43" name="Text 36">
+            <a:extLst>
+              <a:ext uri="{FF2B5EF4-FFF2-40B4-BE49-F238E27FC236}">
+                <a16:creationId xmlns:a16="http://schemas.microsoft.com/office/drawing/2014/main" id="{CED61703-3929-8326-3F9D-95A61BAE99A9}"/>
+              </a:ext>
+            </a:extLst>
+          </p:cNvPr>
+          <p:cNvSpPr/>
+          <p:nvPr/>
+        </p:nvSpPr>
+        <p:spPr>
+          <a:xfrm>
+            <a:off x="4709160" y="3868928"/>
             <a:ext cx="2011680" cy="502920"/>
           </a:xfrm>
           <a:prstGeom prst="rect">
@@ -2136,13 +2471,19 @@
       </p:sp>
       <p:sp>
         <p:nvSpPr>
-          <p:cNvPr id="44" name="Text 37"/>
-          <p:cNvSpPr/>
-          <p:nvPr/>
-        </p:nvSpPr>
-        <p:spPr>
-          <a:xfrm>
-            <a:off x="4736592" y="4050792"/>
+          <p:cNvPr id="44" name="Text 37">
+            <a:extLst>
+              <a:ext uri="{FF2B5EF4-FFF2-40B4-BE49-F238E27FC236}">
+                <a16:creationId xmlns:a16="http://schemas.microsoft.com/office/drawing/2014/main" id="{F0C504BC-3887-2EEB-C659-825CDC948078}"/>
+              </a:ext>
+            </a:extLst>
+          </p:cNvPr>
+          <p:cNvSpPr/>
+          <p:nvPr/>
+        </p:nvSpPr>
+        <p:spPr>
+          <a:xfrm>
+            <a:off x="4736592" y="4380992"/>
             <a:ext cx="1956816" cy="576072"/>
           </a:xfrm>
           <a:prstGeom prst="rect">
@@ -2178,13 +2519,19 @@
       </p:sp>
       <p:sp>
         <p:nvSpPr>
-          <p:cNvPr id="45" name="Shape 38"/>
-          <p:cNvSpPr/>
-          <p:nvPr/>
-        </p:nvSpPr>
-        <p:spPr>
-          <a:xfrm>
-            <a:off x="7040880" y="3429000"/>
+          <p:cNvPr id="45" name="Shape 38">
+            <a:extLst>
+              <a:ext uri="{FF2B5EF4-FFF2-40B4-BE49-F238E27FC236}">
+                <a16:creationId xmlns:a16="http://schemas.microsoft.com/office/drawing/2014/main" id="{4F9CD8E3-C409-5920-8940-5AC22B5F6E09}"/>
+              </a:ext>
+            </a:extLst>
+          </p:cNvPr>
+          <p:cNvSpPr/>
+          <p:nvPr/>
+        </p:nvSpPr>
+        <p:spPr>
+          <a:xfrm>
+            <a:off x="7040880" y="3759200"/>
             <a:ext cx="2286000" cy="1234440"/>
           </a:xfrm>
           <a:prstGeom prst="roundRect">
@@ -2212,13 +2559,19 @@
       </p:sp>
       <p:sp>
         <p:nvSpPr>
-          <p:cNvPr id="46" name="Text 39"/>
-          <p:cNvSpPr/>
-          <p:nvPr/>
-        </p:nvSpPr>
-        <p:spPr>
-          <a:xfrm>
-            <a:off x="7178040" y="3538728"/>
+          <p:cNvPr id="46" name="Text 39">
+            <a:extLst>
+              <a:ext uri="{FF2B5EF4-FFF2-40B4-BE49-F238E27FC236}">
+                <a16:creationId xmlns:a16="http://schemas.microsoft.com/office/drawing/2014/main" id="{ACEAA6FF-503D-C9A0-8EDA-C2EBE8DB121F}"/>
+              </a:ext>
+            </a:extLst>
+          </p:cNvPr>
+          <p:cNvSpPr/>
+          <p:nvPr/>
+        </p:nvSpPr>
+        <p:spPr>
+          <a:xfrm>
+            <a:off x="7178040" y="3868928"/>
             <a:ext cx="2011680" cy="502920"/>
           </a:xfrm>
           <a:prstGeom prst="rect">
@@ -2251,13 +2604,19 @@
       </p:sp>
       <p:sp>
         <p:nvSpPr>
-          <p:cNvPr id="47" name="Text 40"/>
-          <p:cNvSpPr/>
-          <p:nvPr/>
-        </p:nvSpPr>
-        <p:spPr>
-          <a:xfrm>
-            <a:off x="7205472" y="4050792"/>
+          <p:cNvPr id="47" name="Text 40">
+            <a:extLst>
+              <a:ext uri="{FF2B5EF4-FFF2-40B4-BE49-F238E27FC236}">
+                <a16:creationId xmlns:a16="http://schemas.microsoft.com/office/drawing/2014/main" id="{4EE1D108-EC74-42A5-AB2A-44C0D0C4C48A}"/>
+              </a:ext>
+            </a:extLst>
+          </p:cNvPr>
+          <p:cNvSpPr/>
+          <p:nvPr/>
+        </p:nvSpPr>
+        <p:spPr>
+          <a:xfrm>
+            <a:off x="7205472" y="4380992"/>
             <a:ext cx="1956816" cy="576072"/>
           </a:xfrm>
           <a:prstGeom prst="rect">
@@ -2285,7 +2644,7 @@
                 <a:ea typeface="Arial" pitchFamily="34" charset="-122"/>
                 <a:cs typeface="Arial" pitchFamily="34" charset="-120"/>
               </a:rPr>
-              <a:t>real world queries being compiled as the template corpus</a:t>
+              <a:t>real-world queries being compiled into the template corpus</a:t>
             </a:r>
             <a:endParaRPr lang="en-US" sz="1050" dirty="0"/>
           </a:p>
@@ -2293,13 +2652,19 @@
       </p:sp>
       <p:sp>
         <p:nvSpPr>
-          <p:cNvPr id="48" name="Shape 41"/>
-          <p:cNvSpPr/>
-          <p:nvPr/>
-        </p:nvSpPr>
-        <p:spPr>
-          <a:xfrm>
-            <a:off x="9509760" y="3429000"/>
+          <p:cNvPr id="48" name="Shape 41">
+            <a:extLst>
+              <a:ext uri="{FF2B5EF4-FFF2-40B4-BE49-F238E27FC236}">
+                <a16:creationId xmlns:a16="http://schemas.microsoft.com/office/drawing/2014/main" id="{0078CE3A-A1AB-4AC4-2DB3-CCBBF4D62972}"/>
+              </a:ext>
+            </a:extLst>
+          </p:cNvPr>
+          <p:cNvSpPr/>
+          <p:nvPr/>
+        </p:nvSpPr>
+        <p:spPr>
+          <a:xfrm>
+            <a:off x="9509760" y="3759200"/>
             <a:ext cx="2286000" cy="1234440"/>
           </a:xfrm>
           <a:prstGeom prst="roundRect">
@@ -2327,13 +2692,19 @@
       </p:sp>
       <p:sp>
         <p:nvSpPr>
-          <p:cNvPr id="49" name="Text 42"/>
-          <p:cNvSpPr/>
-          <p:nvPr/>
-        </p:nvSpPr>
-        <p:spPr>
-          <a:xfrm>
-            <a:off x="9646920" y="3538728"/>
+          <p:cNvPr id="49" name="Text 42">
+            <a:extLst>
+              <a:ext uri="{FF2B5EF4-FFF2-40B4-BE49-F238E27FC236}">
+                <a16:creationId xmlns:a16="http://schemas.microsoft.com/office/drawing/2014/main" id="{BAB23A1B-8F0B-B219-6DFE-D539DBD32DE6}"/>
+              </a:ext>
+            </a:extLst>
+          </p:cNvPr>
+          <p:cNvSpPr/>
+          <p:nvPr/>
+        </p:nvSpPr>
+        <p:spPr>
+          <a:xfrm>
+            <a:off x="9646920" y="3868928"/>
             <a:ext cx="2011680" cy="502920"/>
           </a:xfrm>
           <a:prstGeom prst="rect">
@@ -2366,13 +2737,19 @@
       </p:sp>
       <p:sp>
         <p:nvSpPr>
-          <p:cNvPr id="50" name="Text 43"/>
-          <p:cNvSpPr/>
-          <p:nvPr/>
-        </p:nvSpPr>
-        <p:spPr>
-          <a:xfrm>
-            <a:off x="9674352" y="4050792"/>
+          <p:cNvPr id="50" name="Text 43">
+            <a:extLst>
+              <a:ext uri="{FF2B5EF4-FFF2-40B4-BE49-F238E27FC236}">
+                <a16:creationId xmlns:a16="http://schemas.microsoft.com/office/drawing/2014/main" id="{4F136830-FDE9-962C-A279-F296DC0561E5}"/>
+              </a:ext>
+            </a:extLst>
+          </p:cNvPr>
+          <p:cNvSpPr/>
+          <p:nvPr/>
+        </p:nvSpPr>
+        <p:spPr>
+          <a:xfrm>
+            <a:off x="9674352" y="4380992"/>
             <a:ext cx="1956816" cy="576072"/>
           </a:xfrm>
           <a:prstGeom prst="rect">
@@ -2408,14 +2785,20 @@
       </p:sp>
       <p:sp>
         <p:nvSpPr>
-          <p:cNvPr id="51" name="Shape 44"/>
-          <p:cNvSpPr/>
-          <p:nvPr/>
-        </p:nvSpPr>
-        <p:spPr>
-          <a:xfrm>
-            <a:off x="4572000" y="5029200"/>
-            <a:ext cx="7223760" cy="1417320"/>
+          <p:cNvPr id="51" name="Shape 44">
+            <a:extLst>
+              <a:ext uri="{FF2B5EF4-FFF2-40B4-BE49-F238E27FC236}">
+                <a16:creationId xmlns:a16="http://schemas.microsoft.com/office/drawing/2014/main" id="{27FC3565-5760-F012-7D6B-83D4778A6A69}"/>
+              </a:ext>
+            </a:extLst>
+          </p:cNvPr>
+          <p:cNvSpPr/>
+          <p:nvPr/>
+        </p:nvSpPr>
+        <p:spPr>
+          <a:xfrm>
+            <a:off x="4572000" y="5111750"/>
+            <a:ext cx="7223760" cy="1234440"/>
           </a:xfrm>
           <a:prstGeom prst="rect">
             <a:avLst/>
@@ -2435,7 +2818,13 @@
       </p:sp>
       <p:pic>
         <p:nvPicPr>
-          <p:cNvPr id="52" name="Image 5" descr="preencoded.png"/>
+          <p:cNvPr id="52" name="Image 5" descr="preencoded.png">
+            <a:extLst>
+              <a:ext uri="{FF2B5EF4-FFF2-40B4-BE49-F238E27FC236}">
+                <a16:creationId xmlns:a16="http://schemas.microsoft.com/office/drawing/2014/main" id="{1EF85F91-B9BA-2960-8C0E-D4680E044A81}"/>
+              </a:ext>
+            </a:extLst>
+          </p:cNvPr>
           <p:cNvPicPr>
             <a:picLocks noChangeAspect="1"/>
           </p:cNvPicPr>
@@ -2449,7 +2838,7 @@
         </p:blipFill>
         <p:spPr>
           <a:xfrm>
-            <a:off x="4800600" y="5193792"/>
+            <a:off x="4800600" y="5276342"/>
             <a:ext cx="365760" cy="365760"/>
           </a:xfrm>
           <a:prstGeom prst="rect">
@@ -2459,13 +2848,19 @@
       </p:pic>
       <p:sp>
         <p:nvSpPr>
-          <p:cNvPr id="53" name="Text 45"/>
-          <p:cNvSpPr/>
-          <p:nvPr/>
-        </p:nvSpPr>
-        <p:spPr>
-          <a:xfrm>
-            <a:off x="5285232" y="5166360"/>
+          <p:cNvPr id="53" name="Text 45">
+            <a:extLst>
+              <a:ext uri="{FF2B5EF4-FFF2-40B4-BE49-F238E27FC236}">
+                <a16:creationId xmlns:a16="http://schemas.microsoft.com/office/drawing/2014/main" id="{21A8C45A-1BFE-B731-4187-72BF927660B4}"/>
+              </a:ext>
+            </a:extLst>
+          </p:cNvPr>
+          <p:cNvSpPr/>
+          <p:nvPr/>
+        </p:nvSpPr>
+        <p:spPr>
+          <a:xfrm>
+            <a:off x="5285232" y="5248910"/>
             <a:ext cx="2743200" cy="365760"/>
           </a:xfrm>
           <a:prstGeom prst="rect">
@@ -2498,14 +2893,20 @@
       </p:sp>
       <p:sp>
         <p:nvSpPr>
-          <p:cNvPr id="54" name="Text 46"/>
-          <p:cNvSpPr/>
-          <p:nvPr/>
-        </p:nvSpPr>
-        <p:spPr>
-          <a:xfrm>
-            <a:off x="4800600" y="5596128"/>
-            <a:ext cx="6766560" cy="425677"/>
+          <p:cNvPr id="54" name="Text 46">
+            <a:extLst>
+              <a:ext uri="{FF2B5EF4-FFF2-40B4-BE49-F238E27FC236}">
+                <a16:creationId xmlns:a16="http://schemas.microsoft.com/office/drawing/2014/main" id="{F118A0F3-64B5-D566-2144-89BF1BF90778}"/>
+              </a:ext>
+            </a:extLst>
+          </p:cNvPr>
+          <p:cNvSpPr/>
+          <p:nvPr/>
+        </p:nvSpPr>
+        <p:spPr>
+          <a:xfrm>
+            <a:off x="4663440" y="5678678"/>
+            <a:ext cx="6903720" cy="614172"/>
           </a:xfrm>
           <a:prstGeom prst="rect">
             <a:avLst/>
@@ -2533,7 +2934,7 @@
                 <a:ea typeface="Arial" pitchFamily="34" charset="-122"/>
                 <a:cs typeface="Arial" pitchFamily="34" charset="-120"/>
               </a:rPr>
-              <a:t>Build the 100+ example query corpus from real support tickets — no dependencies, start now</a:t>
+              <a:t>Build the 1000+ example query corpus from real-world queries — no dependencies, start now</a:t>
             </a:r>
             <a:endParaRPr lang="en-US" sz="1100" dirty="0"/>
           </a:p>
@@ -2554,13 +2955,18 @@
                 <a:ea typeface="Arial" pitchFamily="34" charset="-122"/>
                 <a:cs typeface="Arial" pitchFamily="34" charset="-120"/>
               </a:rPr>
-              <a:t>Build the Asset Menu: catalog Libraries (with metadata) + APIs (with signatures) into one shared schema</a:t>
+              <a:t>Build the Assets Inventory and Menu: catalog Libraries (with metadata) + APIs (with signatures) into one shared schema</a:t>
             </a:r>
             <a:endParaRPr lang="en-US" sz="1100" dirty="0"/>
           </a:p>
         </p:txBody>
       </p:sp>
     </p:spTree>
+    <p:extLst>
+      <p:ext uri="{BB962C8B-B14F-4D97-AF65-F5344CB8AC3E}">
+        <p14:creationId xmlns:p14="http://schemas.microsoft.com/office/powerpoint/2010/main" val="954790053"/>
+      </p:ext>
+    </p:extLst>
   </p:cSld>
   <p:clrMapOvr>
     <a:masterClrMapping/>
@@ -2573,7 +2979,13 @@
   <p:cSld>
     <p:spTree>
       <p:nvGrpSpPr>
-        <p:cNvPr id="1" name=""/>
+        <p:cNvPr id="1" name="">
+          <a:extLst>
+            <a:ext uri="{FF2B5EF4-FFF2-40B4-BE49-F238E27FC236}">
+              <a16:creationId xmlns:a16="http://schemas.microsoft.com/office/drawing/2014/main" id="{A3852EFF-ABD4-B9CE-8677-391F54DB2D72}"/>
+            </a:ext>
+          </a:extLst>
+        </p:cNvPr>
         <p:cNvGrpSpPr/>
         <p:nvPr/>
       </p:nvGrpSpPr>
@@ -2587,7 +2999,13 @@
       </p:grpSpPr>
       <p:sp>
         <p:nvSpPr>
-          <p:cNvPr id="2" name="Shape 0"/>
+          <p:cNvPr id="2" name="Shape 0">
+            <a:extLst>
+              <a:ext uri="{FF2B5EF4-FFF2-40B4-BE49-F238E27FC236}">
+                <a16:creationId xmlns:a16="http://schemas.microsoft.com/office/drawing/2014/main" id="{72CF96C1-85FD-E1C0-D795-3C5710FCCCCD}"/>
+              </a:ext>
+            </a:extLst>
+          </p:cNvPr>
           <p:cNvSpPr/>
           <p:nvPr/>
         </p:nvSpPr>
@@ -2614,7 +3032,13 @@
       </p:sp>
       <p:sp>
         <p:nvSpPr>
-          <p:cNvPr id="3" name="Shape 1"/>
+          <p:cNvPr id="3" name="Shape 1">
+            <a:extLst>
+              <a:ext uri="{FF2B5EF4-FFF2-40B4-BE49-F238E27FC236}">
+                <a16:creationId xmlns:a16="http://schemas.microsoft.com/office/drawing/2014/main" id="{242789FA-E5A4-E9C9-D36B-77045DDDF015}"/>
+              </a:ext>
+            </a:extLst>
+          </p:cNvPr>
           <p:cNvSpPr/>
           <p:nvPr/>
         </p:nvSpPr>
@@ -2641,7 +3065,13 @@
       </p:sp>
       <p:pic>
         <p:nvPicPr>
-          <p:cNvPr id="4" name="Image 0" descr="preencoded.png"/>
+          <p:cNvPr id="4" name="Image 0" descr="preencoded.png">
+            <a:extLst>
+              <a:ext uri="{FF2B5EF4-FFF2-40B4-BE49-F238E27FC236}">
+                <a16:creationId xmlns:a16="http://schemas.microsoft.com/office/drawing/2014/main" id="{BFC742F0-920B-37DC-058E-541F4E4EED5F}"/>
+              </a:ext>
+            </a:extLst>
+          </p:cNvPr>
           <p:cNvPicPr>
             <a:picLocks noChangeAspect="1"/>
           </p:cNvPicPr>
@@ -2665,7 +3095,13 @@
       </p:pic>
       <p:sp>
         <p:nvSpPr>
-          <p:cNvPr id="5" name="Text 2"/>
+          <p:cNvPr id="5" name="Text 2">
+            <a:extLst>
+              <a:ext uri="{FF2B5EF4-FFF2-40B4-BE49-F238E27FC236}">
+                <a16:creationId xmlns:a16="http://schemas.microsoft.com/office/drawing/2014/main" id="{FF8DB3D9-6ACD-99CC-B8A6-5A4BB4348072}"/>
+              </a:ext>
+            </a:extLst>
+          </p:cNvPr>
           <p:cNvSpPr/>
           <p:nvPr/>
         </p:nvSpPr>
@@ -2696,7 +3132,7 @@
                 <a:ea typeface="Arial" pitchFamily="34" charset="-122"/>
                 <a:cs typeface="Arial" pitchFamily="34" charset="-120"/>
               </a:rPr>
-              <a:t>LONG-TERM PLAN</a:t>
+              <a:t>WSD Data SaaS for AI Agents</a:t>
             </a:r>
             <a:endParaRPr lang="en-US" sz="2500" dirty="0"/>
           </a:p>
@@ -2704,14 +3140,20 @@
       </p:sp>
       <p:sp>
         <p:nvSpPr>
-          <p:cNvPr id="6" name="Text 3"/>
+          <p:cNvPr id="6" name="Text 3">
+            <a:extLst>
+              <a:ext uri="{FF2B5EF4-FFF2-40B4-BE49-F238E27FC236}">
+                <a16:creationId xmlns:a16="http://schemas.microsoft.com/office/drawing/2014/main" id="{3DFE85AE-4D5F-6E2E-2FCA-A6088E1D7675}"/>
+              </a:ext>
+            </a:extLst>
+          </p:cNvPr>
           <p:cNvSpPr/>
           <p:nvPr/>
         </p:nvSpPr>
         <p:spPr>
           <a:xfrm>
             <a:off x="457200" y="1170432"/>
-            <a:ext cx="3337560" cy="365760"/>
+            <a:ext cx="3456432" cy="365760"/>
           </a:xfrm>
           <a:prstGeom prst="rect">
             <a:avLst/>
@@ -2735,7 +3177,7 @@
                 <a:ea typeface="Arial" pitchFamily="34" charset="-122"/>
                 <a:cs typeface="Arial" pitchFamily="34" charset="-120"/>
               </a:rPr>
-              <a:t>Agent-Native Asset Menu Consumption</a:t>
+              <a:t>Agent-Native WSD Data SaaS Consumption</a:t>
             </a:r>
             <a:endParaRPr lang="en-US" sz="1350" dirty="0"/>
           </a:p>
@@ -2743,7 +3185,13 @@
       </p:sp>
       <p:sp>
         <p:nvSpPr>
-          <p:cNvPr id="7" name="Text 4"/>
+          <p:cNvPr id="7" name="Text 4">
+            <a:extLst>
+              <a:ext uri="{FF2B5EF4-FFF2-40B4-BE49-F238E27FC236}">
+                <a16:creationId xmlns:a16="http://schemas.microsoft.com/office/drawing/2014/main" id="{4FFED461-493C-C880-6D1D-B314DD36C7AF}"/>
+              </a:ext>
+            </a:extLst>
+          </p:cNvPr>
           <p:cNvSpPr/>
           <p:nvPr/>
         </p:nvSpPr>
@@ -2782,7 +3230,13 @@
       </p:sp>
       <p:sp>
         <p:nvSpPr>
-          <p:cNvPr id="8" name="Text 5"/>
+          <p:cNvPr id="8" name="Text 5">
+            <a:extLst>
+              <a:ext uri="{FF2B5EF4-FFF2-40B4-BE49-F238E27FC236}">
+                <a16:creationId xmlns:a16="http://schemas.microsoft.com/office/drawing/2014/main" id="{BC1764FE-8240-7F0D-7635-983ED4FB89DB}"/>
+              </a:ext>
+            </a:extLst>
+          </p:cNvPr>
           <p:cNvSpPr/>
           <p:nvPr/>
         </p:nvSpPr>
@@ -2824,7 +3278,13 @@
       </p:sp>
       <p:sp>
         <p:nvSpPr>
-          <p:cNvPr id="9" name="Shape 6"/>
+          <p:cNvPr id="9" name="Shape 6">
+            <a:extLst>
+              <a:ext uri="{FF2B5EF4-FFF2-40B4-BE49-F238E27FC236}">
+                <a16:creationId xmlns:a16="http://schemas.microsoft.com/office/drawing/2014/main" id="{AECC7846-0706-FEE5-56CC-60789C566058}"/>
+              </a:ext>
+            </a:extLst>
+          </p:cNvPr>
           <p:cNvSpPr/>
           <p:nvPr/>
         </p:nvSpPr>
@@ -2851,7 +3311,13 @@
       </p:sp>
       <p:sp>
         <p:nvSpPr>
-          <p:cNvPr id="10" name="Text 7"/>
+          <p:cNvPr id="10" name="Text 7">
+            <a:extLst>
+              <a:ext uri="{FF2B5EF4-FFF2-40B4-BE49-F238E27FC236}">
+                <a16:creationId xmlns:a16="http://schemas.microsoft.com/office/drawing/2014/main" id="{32811C0E-A3B1-6FF2-AC8C-1B59C222E825}"/>
+              </a:ext>
+            </a:extLst>
+          </p:cNvPr>
           <p:cNvSpPr/>
           <p:nvPr/>
         </p:nvSpPr>
@@ -2890,7 +3356,13 @@
       </p:sp>
       <p:sp>
         <p:nvSpPr>
-          <p:cNvPr id="11" name="Text 8"/>
+          <p:cNvPr id="11" name="Text 8">
+            <a:extLst>
+              <a:ext uri="{FF2B5EF4-FFF2-40B4-BE49-F238E27FC236}">
+                <a16:creationId xmlns:a16="http://schemas.microsoft.com/office/drawing/2014/main" id="{E97FA723-B6BC-BB8A-5008-66CA65ADA511}"/>
+              </a:ext>
+            </a:extLst>
+          </p:cNvPr>
           <p:cNvSpPr/>
           <p:nvPr/>
         </p:nvSpPr>
@@ -2932,7 +3404,13 @@
       </p:sp>
       <p:sp>
         <p:nvSpPr>
-          <p:cNvPr id="12" name="Shape 9"/>
+          <p:cNvPr id="12" name="Shape 9">
+            <a:extLst>
+              <a:ext uri="{FF2B5EF4-FFF2-40B4-BE49-F238E27FC236}">
+                <a16:creationId xmlns:a16="http://schemas.microsoft.com/office/drawing/2014/main" id="{E9FF208A-CFB6-30E2-0B49-54C08A41901B}"/>
+              </a:ext>
+            </a:extLst>
+          </p:cNvPr>
           <p:cNvSpPr/>
           <p:nvPr/>
         </p:nvSpPr>
@@ -2959,7 +3437,13 @@
       </p:sp>
       <p:sp>
         <p:nvSpPr>
-          <p:cNvPr id="13" name="Text 10"/>
+          <p:cNvPr id="13" name="Text 10">
+            <a:extLst>
+              <a:ext uri="{FF2B5EF4-FFF2-40B4-BE49-F238E27FC236}">
+                <a16:creationId xmlns:a16="http://schemas.microsoft.com/office/drawing/2014/main" id="{D4CD4404-5386-F022-B456-9D017DAE7492}"/>
+              </a:ext>
+            </a:extLst>
+          </p:cNvPr>
           <p:cNvSpPr/>
           <p:nvPr/>
         </p:nvSpPr>
@@ -2998,7 +3482,13 @@
       </p:sp>
       <p:sp>
         <p:nvSpPr>
-          <p:cNvPr id="14" name="Text 11"/>
+          <p:cNvPr id="14" name="Text 11">
+            <a:extLst>
+              <a:ext uri="{FF2B5EF4-FFF2-40B4-BE49-F238E27FC236}">
+                <a16:creationId xmlns:a16="http://schemas.microsoft.com/office/drawing/2014/main" id="{D952E20D-9274-BD28-4188-39F7983CC7B1}"/>
+              </a:ext>
+            </a:extLst>
+          </p:cNvPr>
           <p:cNvSpPr/>
           <p:nvPr/>
         </p:nvSpPr>
@@ -3040,7 +3530,13 @@
       </p:sp>
       <p:sp>
         <p:nvSpPr>
-          <p:cNvPr id="15" name="Shape 12"/>
+          <p:cNvPr id="15" name="Shape 12">
+            <a:extLst>
+              <a:ext uri="{FF2B5EF4-FFF2-40B4-BE49-F238E27FC236}">
+                <a16:creationId xmlns:a16="http://schemas.microsoft.com/office/drawing/2014/main" id="{A3DF4022-9E51-776B-C817-841920D610E8}"/>
+              </a:ext>
+            </a:extLst>
+          </p:cNvPr>
           <p:cNvSpPr/>
           <p:nvPr/>
         </p:nvSpPr>
@@ -3074,7 +3570,13 @@
       </p:sp>
       <p:sp>
         <p:nvSpPr>
-          <p:cNvPr id="16" name="Text 13"/>
+          <p:cNvPr id="16" name="Text 13">
+            <a:extLst>
+              <a:ext uri="{FF2B5EF4-FFF2-40B4-BE49-F238E27FC236}">
+                <a16:creationId xmlns:a16="http://schemas.microsoft.com/office/drawing/2014/main" id="{0F3BAC0E-D1F0-438F-4871-A8D575266CF6}"/>
+              </a:ext>
+            </a:extLst>
+          </p:cNvPr>
           <p:cNvSpPr/>
           <p:nvPr/>
         </p:nvSpPr>
@@ -3130,7 +3632,13 @@
       </p:sp>
       <p:sp>
         <p:nvSpPr>
-          <p:cNvPr id="17" name="Text 14"/>
+          <p:cNvPr id="17" name="Text 14">
+            <a:extLst>
+              <a:ext uri="{FF2B5EF4-FFF2-40B4-BE49-F238E27FC236}">
+                <a16:creationId xmlns:a16="http://schemas.microsoft.com/office/drawing/2014/main" id="{4881B24A-FF12-71E4-B247-0E913D45769D}"/>
+              </a:ext>
+            </a:extLst>
+          </p:cNvPr>
           <p:cNvSpPr/>
           <p:nvPr/>
         </p:nvSpPr>
@@ -3161,7 +3669,7 @@
                 <a:ea typeface="Arial" pitchFamily="34" charset="-122"/>
                 <a:cs typeface="Arial" pitchFamily="34" charset="-120"/>
               </a:rPr>
-              <a:t>HOW IT WORKS — LONG-TERM PLAN</a:t>
+              <a:t>HOW IT WORKS — V2</a:t>
             </a:r>
             <a:endParaRPr lang="en-US" sz="1900" dirty="0"/>
           </a:p>
@@ -3169,7 +3677,13 @@
       </p:sp>
       <p:sp>
         <p:nvSpPr>
-          <p:cNvPr id="18" name="Text 15"/>
+          <p:cNvPr id="18" name="Text 15">
+            <a:extLst>
+              <a:ext uri="{FF2B5EF4-FFF2-40B4-BE49-F238E27FC236}">
+                <a16:creationId xmlns:a16="http://schemas.microsoft.com/office/drawing/2014/main" id="{5A930537-CE02-B377-925A-CA47EC30D7EF}"/>
+              </a:ext>
+            </a:extLst>
+          </p:cNvPr>
           <p:cNvSpPr/>
           <p:nvPr/>
         </p:nvSpPr>
@@ -3200,7 +3714,7 @@
                 <a:ea typeface="Arial" pitchFamily="34" charset="-122"/>
                 <a:cs typeface="Arial" pitchFamily="34" charset="-120"/>
               </a:rPr>
-              <a:t>Agent consumes the Asset Menu directly as callable tools — not yet scheduled</a:t>
+              <a:t>WSD AI Agents consume the Assets Inventory/Menu directly as callable tools</a:t>
             </a:r>
             <a:endParaRPr lang="en-US" sz="1250" dirty="0"/>
           </a:p>
@@ -3208,7 +3722,13 @@
       </p:sp>
       <p:sp>
         <p:nvSpPr>
-          <p:cNvPr id="19" name="Shape 16"/>
+          <p:cNvPr id="19" name="Shape 16">
+            <a:extLst>
+              <a:ext uri="{FF2B5EF4-FFF2-40B4-BE49-F238E27FC236}">
+                <a16:creationId xmlns:a16="http://schemas.microsoft.com/office/drawing/2014/main" id="{ACE37D58-F6FE-6E41-2A37-9338CE755785}"/>
+              </a:ext>
+            </a:extLst>
+          </p:cNvPr>
           <p:cNvSpPr/>
           <p:nvPr/>
         </p:nvSpPr>
@@ -3244,7 +3764,13 @@
       </p:sp>
       <p:sp>
         <p:nvSpPr>
-          <p:cNvPr id="20" name="Shape 17"/>
+          <p:cNvPr id="20" name="Shape 17">
+            <a:extLst>
+              <a:ext uri="{FF2B5EF4-FFF2-40B4-BE49-F238E27FC236}">
+                <a16:creationId xmlns:a16="http://schemas.microsoft.com/office/drawing/2014/main" id="{AFE3271C-CC45-51EA-ECEA-0318596ADD20}"/>
+              </a:ext>
+            </a:extLst>
+          </p:cNvPr>
           <p:cNvSpPr/>
           <p:nvPr/>
         </p:nvSpPr>
@@ -3271,7 +3797,13 @@
       </p:sp>
       <p:pic>
         <p:nvPicPr>
-          <p:cNvPr id="21" name="Image 1" descr="preencoded.png"/>
+          <p:cNvPr id="21" name="Image 1" descr="preencoded.png">
+            <a:extLst>
+              <a:ext uri="{FF2B5EF4-FFF2-40B4-BE49-F238E27FC236}">
+                <a16:creationId xmlns:a16="http://schemas.microsoft.com/office/drawing/2014/main" id="{4EFB9DD5-97C2-DF35-5D78-653585754EEF}"/>
+              </a:ext>
+            </a:extLst>
+          </p:cNvPr>
           <p:cNvPicPr>
             <a:picLocks noChangeAspect="1"/>
           </p:cNvPicPr>
@@ -3295,7 +3827,13 @@
       </p:pic>
       <p:sp>
         <p:nvSpPr>
-          <p:cNvPr id="22" name="Text 18"/>
+          <p:cNvPr id="22" name="Text 18">
+            <a:extLst>
+              <a:ext uri="{FF2B5EF4-FFF2-40B4-BE49-F238E27FC236}">
+                <a16:creationId xmlns:a16="http://schemas.microsoft.com/office/drawing/2014/main" id="{D62EB679-0128-C79B-AD65-F28111D1FFC8}"/>
+              </a:ext>
+            </a:extLst>
+          </p:cNvPr>
           <p:cNvSpPr/>
           <p:nvPr/>
         </p:nvSpPr>
@@ -3334,7 +3872,13 @@
       </p:sp>
       <p:sp>
         <p:nvSpPr>
-          <p:cNvPr id="23" name="Text 19"/>
+          <p:cNvPr id="23" name="Text 19">
+            <a:extLst>
+              <a:ext uri="{FF2B5EF4-FFF2-40B4-BE49-F238E27FC236}">
+                <a16:creationId xmlns:a16="http://schemas.microsoft.com/office/drawing/2014/main" id="{1F7B3960-BBDB-F78E-D36F-FA8E91EE51E9}"/>
+              </a:ext>
+            </a:extLst>
+          </p:cNvPr>
           <p:cNvSpPr/>
           <p:nvPr/>
         </p:nvSpPr>
@@ -3376,7 +3920,13 @@
       </p:sp>
       <p:sp>
         <p:nvSpPr>
-          <p:cNvPr id="24" name="Text 20"/>
+          <p:cNvPr id="24" name="Text 20">
+            <a:extLst>
+              <a:ext uri="{FF2B5EF4-FFF2-40B4-BE49-F238E27FC236}">
+                <a16:creationId xmlns:a16="http://schemas.microsoft.com/office/drawing/2014/main" id="{E427F744-219E-3CD6-4195-D32C4369348E}"/>
+              </a:ext>
+            </a:extLst>
+          </p:cNvPr>
           <p:cNvSpPr/>
           <p:nvPr/>
         </p:nvSpPr>
@@ -3415,7 +3965,13 @@
       </p:sp>
       <p:sp>
         <p:nvSpPr>
-          <p:cNvPr id="25" name="Shape 21"/>
+          <p:cNvPr id="25" name="Shape 21">
+            <a:extLst>
+              <a:ext uri="{FF2B5EF4-FFF2-40B4-BE49-F238E27FC236}">
+                <a16:creationId xmlns:a16="http://schemas.microsoft.com/office/drawing/2014/main" id="{29EB9376-A55E-42FA-4FB9-0629961BB56D}"/>
+              </a:ext>
+            </a:extLst>
+          </p:cNvPr>
           <p:cNvSpPr/>
           <p:nvPr/>
         </p:nvSpPr>
@@ -3451,7 +4007,13 @@
       </p:sp>
       <p:sp>
         <p:nvSpPr>
-          <p:cNvPr id="26" name="Shape 22"/>
+          <p:cNvPr id="26" name="Shape 22">
+            <a:extLst>
+              <a:ext uri="{FF2B5EF4-FFF2-40B4-BE49-F238E27FC236}">
+                <a16:creationId xmlns:a16="http://schemas.microsoft.com/office/drawing/2014/main" id="{CD244EA9-5939-193C-8C2D-41282009B40C}"/>
+              </a:ext>
+            </a:extLst>
+          </p:cNvPr>
           <p:cNvSpPr/>
           <p:nvPr/>
         </p:nvSpPr>
@@ -3478,7 +4040,13 @@
       </p:sp>
       <p:pic>
         <p:nvPicPr>
-          <p:cNvPr id="27" name="Image 2" descr="preencoded.png"/>
+          <p:cNvPr id="27" name="Image 2" descr="preencoded.png">
+            <a:extLst>
+              <a:ext uri="{FF2B5EF4-FFF2-40B4-BE49-F238E27FC236}">
+                <a16:creationId xmlns:a16="http://schemas.microsoft.com/office/drawing/2014/main" id="{25715E26-65BE-59B3-72B3-2F55A0BE2CA4}"/>
+              </a:ext>
+            </a:extLst>
+          </p:cNvPr>
           <p:cNvPicPr>
             <a:picLocks noChangeAspect="1"/>
           </p:cNvPicPr>
@@ -3502,7 +4070,13 @@
       </p:pic>
       <p:sp>
         <p:nvSpPr>
-          <p:cNvPr id="28" name="Text 23"/>
+          <p:cNvPr id="28" name="Text 23">
+            <a:extLst>
+              <a:ext uri="{FF2B5EF4-FFF2-40B4-BE49-F238E27FC236}">
+                <a16:creationId xmlns:a16="http://schemas.microsoft.com/office/drawing/2014/main" id="{1D32E2D9-9642-AC87-385E-FEFEAB86B01D}"/>
+              </a:ext>
+            </a:extLst>
+          </p:cNvPr>
           <p:cNvSpPr/>
           <p:nvPr/>
         </p:nvSpPr>
@@ -3541,7 +4115,13 @@
       </p:sp>
       <p:sp>
         <p:nvSpPr>
-          <p:cNvPr id="29" name="Text 24"/>
+          <p:cNvPr id="29" name="Text 24">
+            <a:extLst>
+              <a:ext uri="{FF2B5EF4-FFF2-40B4-BE49-F238E27FC236}">
+                <a16:creationId xmlns:a16="http://schemas.microsoft.com/office/drawing/2014/main" id="{FBA59606-1689-370E-0511-8F8690732933}"/>
+              </a:ext>
+            </a:extLst>
+          </p:cNvPr>
           <p:cNvSpPr/>
           <p:nvPr/>
         </p:nvSpPr>
@@ -3583,7 +4163,13 @@
       </p:sp>
       <p:sp>
         <p:nvSpPr>
-          <p:cNvPr id="42" name="Shape 35"/>
+          <p:cNvPr id="42" name="Shape 35">
+            <a:extLst>
+              <a:ext uri="{FF2B5EF4-FFF2-40B4-BE49-F238E27FC236}">
+                <a16:creationId xmlns:a16="http://schemas.microsoft.com/office/drawing/2014/main" id="{957B9C6A-BBB4-FFDF-1FA7-0EB5BE5B9D61}"/>
+              </a:ext>
+            </a:extLst>
+          </p:cNvPr>
           <p:cNvSpPr/>
           <p:nvPr/>
         </p:nvSpPr>
@@ -3617,7 +4203,13 @@
       </p:sp>
       <p:sp>
         <p:nvSpPr>
-          <p:cNvPr id="43" name="Text 36"/>
+          <p:cNvPr id="43" name="Text 36">
+            <a:extLst>
+              <a:ext uri="{FF2B5EF4-FFF2-40B4-BE49-F238E27FC236}">
+                <a16:creationId xmlns:a16="http://schemas.microsoft.com/office/drawing/2014/main" id="{3A73F4FD-3BF5-D5FC-FFA1-ADA7B072EA46}"/>
+              </a:ext>
+            </a:extLst>
+          </p:cNvPr>
           <p:cNvSpPr/>
           <p:nvPr/>
         </p:nvSpPr>
@@ -3656,7 +4248,13 @@
       </p:sp>
       <p:sp>
         <p:nvSpPr>
-          <p:cNvPr id="44" name="Text 37"/>
+          <p:cNvPr id="44" name="Text 37">
+            <a:extLst>
+              <a:ext uri="{FF2B5EF4-FFF2-40B4-BE49-F238E27FC236}">
+                <a16:creationId xmlns:a16="http://schemas.microsoft.com/office/drawing/2014/main" id="{B8AA3E5C-55CB-52B3-D391-ACE4E8D9672A}"/>
+              </a:ext>
+            </a:extLst>
+          </p:cNvPr>
           <p:cNvSpPr/>
           <p:nvPr/>
         </p:nvSpPr>
@@ -3698,7 +4296,13 @@
       </p:sp>
       <p:sp>
         <p:nvSpPr>
-          <p:cNvPr id="45" name="Shape 38"/>
+          <p:cNvPr id="45" name="Shape 38">
+            <a:extLst>
+              <a:ext uri="{FF2B5EF4-FFF2-40B4-BE49-F238E27FC236}">
+                <a16:creationId xmlns:a16="http://schemas.microsoft.com/office/drawing/2014/main" id="{3987711C-BD66-F447-19CE-522C13934AF0}"/>
+              </a:ext>
+            </a:extLst>
+          </p:cNvPr>
           <p:cNvSpPr/>
           <p:nvPr/>
         </p:nvSpPr>
@@ -3732,7 +4336,13 @@
       </p:sp>
       <p:sp>
         <p:nvSpPr>
-          <p:cNvPr id="46" name="Text 39"/>
+          <p:cNvPr id="46" name="Text 39">
+            <a:extLst>
+              <a:ext uri="{FF2B5EF4-FFF2-40B4-BE49-F238E27FC236}">
+                <a16:creationId xmlns:a16="http://schemas.microsoft.com/office/drawing/2014/main" id="{34434291-A7CB-C46F-CF6E-589F10CE02A5}"/>
+              </a:ext>
+            </a:extLst>
+          </p:cNvPr>
           <p:cNvSpPr/>
           <p:nvPr/>
         </p:nvSpPr>
@@ -3765,13 +4375,19 @@
               </a:rPr>
               <a:t>Maverick</a:t>
             </a:r>
-            <a:endParaRPr lang="en-US" sz="3000" dirty="0"/>
-          </a:p>
-        </p:txBody>
-      </p:sp>
-      <p:sp>
-        <p:nvSpPr>
-          <p:cNvPr id="47" name="Text 40"/>
+            <a:endParaRPr lang="en-US" sz="2000" dirty="0"/>
+          </a:p>
+        </p:txBody>
+      </p:sp>
+      <p:sp>
+        <p:nvSpPr>
+          <p:cNvPr id="47" name="Text 40">
+            <a:extLst>
+              <a:ext uri="{FF2B5EF4-FFF2-40B4-BE49-F238E27FC236}">
+                <a16:creationId xmlns:a16="http://schemas.microsoft.com/office/drawing/2014/main" id="{EDD975CE-7DE5-DDAF-98A2-97E59D0DA708}"/>
+              </a:ext>
+            </a:extLst>
+          </p:cNvPr>
           <p:cNvSpPr/>
           <p:nvPr/>
         </p:nvSpPr>
@@ -3805,7 +4421,7 @@
                 <a:ea typeface="Arial" pitchFamily="34" charset="-122"/>
                 <a:cs typeface="Arial" pitchFamily="34" charset="-120"/>
               </a:rPr>
-              <a:t>Matures past its current Die Inventory Agent pilot to support tool-chaining</a:t>
+              <a:t>Maverick's tool-chaining execution matures past today's Die Inventory Agent pilot</a:t>
             </a:r>
             <a:endParaRPr lang="en-US" sz="1050" dirty="0"/>
           </a:p>
@@ -3813,7 +4429,13 @@
       </p:sp>
       <p:sp>
         <p:nvSpPr>
-          <p:cNvPr id="48" name="Shape 41"/>
+          <p:cNvPr id="48" name="Shape 41">
+            <a:extLst>
+              <a:ext uri="{FF2B5EF4-FFF2-40B4-BE49-F238E27FC236}">
+                <a16:creationId xmlns:a16="http://schemas.microsoft.com/office/drawing/2014/main" id="{6A006432-2671-0170-C92A-F8221288A37A}"/>
+              </a:ext>
+            </a:extLst>
+          </p:cNvPr>
           <p:cNvSpPr/>
           <p:nvPr/>
         </p:nvSpPr>
@@ -3847,7 +4469,13 @@
       </p:sp>
       <p:sp>
         <p:nvSpPr>
-          <p:cNvPr id="49" name="Text 42"/>
+          <p:cNvPr id="49" name="Text 42">
+            <a:extLst>
+              <a:ext uri="{FF2B5EF4-FFF2-40B4-BE49-F238E27FC236}">
+                <a16:creationId xmlns:a16="http://schemas.microsoft.com/office/drawing/2014/main" id="{EF6E77AF-3770-C3E0-7451-894902B74F22}"/>
+              </a:ext>
+            </a:extLst>
+          </p:cNvPr>
           <p:cNvSpPr/>
           <p:nvPr/>
         </p:nvSpPr>
@@ -3886,7 +4514,13 @@
       </p:sp>
       <p:sp>
         <p:nvSpPr>
-          <p:cNvPr id="50" name="Text 43"/>
+          <p:cNvPr id="50" name="Text 43">
+            <a:extLst>
+              <a:ext uri="{FF2B5EF4-FFF2-40B4-BE49-F238E27FC236}">
+                <a16:creationId xmlns:a16="http://schemas.microsoft.com/office/drawing/2014/main" id="{393F1E5E-3730-C883-2571-24A9F0D52B97}"/>
+              </a:ext>
+            </a:extLst>
+          </p:cNvPr>
           <p:cNvSpPr/>
           <p:nvPr/>
         </p:nvSpPr>
@@ -3928,7 +4562,13 @@
       </p:sp>
       <p:sp>
         <p:nvSpPr>
-          <p:cNvPr id="51" name="Shape 44"/>
+          <p:cNvPr id="51" name="Shape 44">
+            <a:extLst>
+              <a:ext uri="{FF2B5EF4-FFF2-40B4-BE49-F238E27FC236}">
+                <a16:creationId xmlns:a16="http://schemas.microsoft.com/office/drawing/2014/main" id="{24249A4C-5425-60F2-18EC-CD2598B31F78}"/>
+              </a:ext>
+            </a:extLst>
+          </p:cNvPr>
           <p:cNvSpPr/>
           <p:nvPr/>
         </p:nvSpPr>
@@ -3955,7 +4595,13 @@
       </p:sp>
       <p:pic>
         <p:nvPicPr>
-          <p:cNvPr id="52" name="Image 5" descr="preencoded.png"/>
+          <p:cNvPr id="52" name="Image 5" descr="preencoded.png">
+            <a:extLst>
+              <a:ext uri="{FF2B5EF4-FFF2-40B4-BE49-F238E27FC236}">
+                <a16:creationId xmlns:a16="http://schemas.microsoft.com/office/drawing/2014/main" id="{CFE8C94E-2B6B-585E-1F71-F1D14195E95D}"/>
+              </a:ext>
+            </a:extLst>
+          </p:cNvPr>
           <p:cNvPicPr>
             <a:picLocks noChangeAspect="1"/>
           </p:cNvPicPr>
@@ -3979,7 +4625,13 @@
       </p:pic>
       <p:sp>
         <p:nvSpPr>
-          <p:cNvPr id="53" name="Text 45"/>
+          <p:cNvPr id="53" name="Text 45">
+            <a:extLst>
+              <a:ext uri="{FF2B5EF4-FFF2-40B4-BE49-F238E27FC236}">
+                <a16:creationId xmlns:a16="http://schemas.microsoft.com/office/drawing/2014/main" id="{BCAEF583-CFB3-2DE7-BDEA-6D207089A04B}"/>
+              </a:ext>
+            </a:extLst>
+          </p:cNvPr>
           <p:cNvSpPr/>
           <p:nvPr/>
         </p:nvSpPr>
@@ -4018,14 +4670,20 @@
       </p:sp>
       <p:sp>
         <p:nvSpPr>
-          <p:cNvPr id="54" name="Text 46"/>
+          <p:cNvPr id="54" name="Text 46">
+            <a:extLst>
+              <a:ext uri="{FF2B5EF4-FFF2-40B4-BE49-F238E27FC236}">
+                <a16:creationId xmlns:a16="http://schemas.microsoft.com/office/drawing/2014/main" id="{E965E349-DB6C-3C26-F535-A7002199D7A9}"/>
+              </a:ext>
+            </a:extLst>
+          </p:cNvPr>
           <p:cNvSpPr/>
           <p:nvPr/>
         </p:nvSpPr>
         <p:spPr>
           <a:xfrm>
             <a:off x="4800600" y="5596128"/>
-            <a:ext cx="6766560" cy="425677"/>
+            <a:ext cx="6766560" cy="684022"/>
           </a:xfrm>
           <a:prstGeom prst="rect">
             <a:avLst/>
@@ -4053,7 +4711,29 @@
                 <a:ea typeface="Arial" pitchFamily="34" charset="-122"/>
                 <a:cs typeface="Arial" pitchFamily="34" charset="-120"/>
               </a:rPr>
-              <a:t>Design the Asset Menu's metadata schema tool-call-ready now</a:t>
+              <a:t>Design the Asset </a:t>
+            </a:r>
+            <a:r>
+              <a:rPr lang="en-US" sz="1100" dirty="0" err="1">
+                <a:solidFill>
+                  <a:srgbClr val="3B4652"/>
+                </a:solidFill>
+                <a:latin typeface="Arial" pitchFamily="34" charset="0"/>
+                <a:ea typeface="Arial" pitchFamily="34" charset="-122"/>
+                <a:cs typeface="Arial" pitchFamily="34" charset="-120"/>
+              </a:rPr>
+              <a:t>Inventory</a:t>
+            </a:r>
+            <a:r>
+              <a:rPr lang="en-US" sz="1100" dirty="0">
+                <a:solidFill>
+                  <a:srgbClr val="3B4652"/>
+                </a:solidFill>
+                <a:latin typeface="Arial" pitchFamily="34" charset="0"/>
+                <a:ea typeface="Arial" pitchFamily="34" charset="-122"/>
+                <a:cs typeface="Arial" pitchFamily="34" charset="-120"/>
+              </a:rPr>
+              <a:t>/Menu's metadata schema tool-call-ready now</a:t>
             </a:r>
             <a:endParaRPr lang="en-US" sz="1100" dirty="0"/>
           </a:p>
@@ -4076,11 +4756,35 @@
               </a:rPr>
               <a:t>Nothing acts on it until GTO policy or on-prem model accuracy actually closes the gap</a:t>
             </a:r>
+          </a:p>
+          <a:p>
+            <a:pPr marL="342900" indent="-342900">
+              <a:lnSpc>
+                <a:spcPct val="108000"/>
+              </a:lnSpc>
+              <a:buSzPct val="100000"/>
+              <a:buChar char="▸"/>
+            </a:pPr>
+            <a:r>
+              <a:rPr lang="en-US" sz="1100" dirty="0">
+                <a:solidFill>
+                  <a:srgbClr val="3B4652"/>
+                </a:solidFill>
+                <a:latin typeface="Arial" pitchFamily="34" charset="0"/>
+                <a:cs typeface="Arial" pitchFamily="34" charset="-120"/>
+              </a:rPr>
+              <a:t>Maximize reuse of V1 modules </a:t>
+            </a:r>
             <a:endParaRPr lang="en-US" sz="1100" dirty="0"/>
           </a:p>
         </p:txBody>
       </p:sp>
     </p:spTree>
+    <p:extLst>
+      <p:ext uri="{BB962C8B-B14F-4D97-AF65-F5344CB8AC3E}">
+        <p14:creationId xmlns:p14="http://schemas.microsoft.com/office/powerpoint/2010/main" val="615746151"/>
+      </p:ext>
+    </p:extLst>
   </p:cSld>
   <p:clrMapOvr>
     <a:masterClrMapping/>
